--- a/Introduction to Machine Learning.pptx
+++ b/Introduction to Machine Learning.pptx
@@ -5,23 +5,24 @@
     <p:sldMasterId id="2147483648" r:id="rId1"/>
   </p:sldMasterIdLst>
   <p:notesMasterIdLst>
-    <p:notesMasterId r:id="rId16"/>
+    <p:notesMasterId r:id="rId17"/>
   </p:notesMasterIdLst>
   <p:sldIdLst>
     <p:sldId id="275" r:id="rId2"/>
     <p:sldId id="258" r:id="rId3"/>
-    <p:sldId id="259" r:id="rId4"/>
-    <p:sldId id="260" r:id="rId5"/>
-    <p:sldId id="261" r:id="rId6"/>
-    <p:sldId id="263" r:id="rId7"/>
-    <p:sldId id="264" r:id="rId8"/>
-    <p:sldId id="265" r:id="rId9"/>
-    <p:sldId id="266" r:id="rId10"/>
-    <p:sldId id="267" r:id="rId11"/>
-    <p:sldId id="268" r:id="rId12"/>
-    <p:sldId id="270" r:id="rId13"/>
-    <p:sldId id="272" r:id="rId14"/>
-    <p:sldId id="273" r:id="rId15"/>
+    <p:sldId id="276" r:id="rId4"/>
+    <p:sldId id="259" r:id="rId5"/>
+    <p:sldId id="266" r:id="rId6"/>
+    <p:sldId id="267" r:id="rId7"/>
+    <p:sldId id="268" r:id="rId8"/>
+    <p:sldId id="270" r:id="rId9"/>
+    <p:sldId id="260" r:id="rId10"/>
+    <p:sldId id="261" r:id="rId11"/>
+    <p:sldId id="263" r:id="rId12"/>
+    <p:sldId id="264" r:id="rId13"/>
+    <p:sldId id="265" r:id="rId14"/>
+    <p:sldId id="272" r:id="rId15"/>
+    <p:sldId id="273" r:id="rId16"/>
   </p:sldIdLst>
   <p:sldSz cx="12192000" cy="6858000"/>
   <p:notesSz cx="6858000" cy="9144000"/>
@@ -210,7 +211,7 @@
           <a:p>
             <a:fld id="{0BBBF393-FF43-D64B-BDE4-F95D1845587A}" type="datetimeFigureOut">
               <a:rPr lang="en-US" smtClean="0"/>
-              <a:t>8/21/26</a:t>
+              <a:t>9/30/26</a:t>
             </a:fld>
             <a:endParaRPr lang="en-US"/>
           </a:p>
@@ -482,7 +483,13 @@
   <p:cSld>
     <p:spTree>
       <p:nvGrpSpPr>
-        <p:cNvPr id="1" name=""/>
+        <p:cNvPr id="1" name="">
+          <a:extLst>
+            <a:ext uri="{FF2B5EF4-FFF2-40B4-BE49-F238E27FC236}">
+              <a16:creationId xmlns:a16="http://schemas.microsoft.com/office/drawing/2014/main" id="{F5CA2136-0894-C8EA-C247-5ABA0023523B}"/>
+            </a:ext>
+          </a:extLst>
+        </p:cNvPr>
         <p:cNvGrpSpPr/>
         <p:nvPr/>
       </p:nvGrpSpPr>
@@ -496,7 +503,13 @@
       </p:grpSpPr>
       <p:sp>
         <p:nvSpPr>
-          <p:cNvPr id="2" name="Slide Image Placeholder 1"/>
+          <p:cNvPr id="2" name="Slide Image Placeholder 1">
+            <a:extLst>
+              <a:ext uri="{FF2B5EF4-FFF2-40B4-BE49-F238E27FC236}">
+                <a16:creationId xmlns:a16="http://schemas.microsoft.com/office/drawing/2014/main" id="{08C97905-150F-F874-8060-891F3C8BF2BD}"/>
+              </a:ext>
+            </a:extLst>
+          </p:cNvPr>
           <p:cNvSpPr>
             <a:spLocks noGrp="1" noRot="1" noChangeAspect="1"/>
           </p:cNvSpPr>
@@ -508,7 +521,13 @@
       </p:sp>
       <p:sp>
         <p:nvSpPr>
-          <p:cNvPr id="3" name="Notes Placeholder 2"/>
+          <p:cNvPr id="3" name="Notes Placeholder 2">
+            <a:extLst>
+              <a:ext uri="{FF2B5EF4-FFF2-40B4-BE49-F238E27FC236}">
+                <a16:creationId xmlns:a16="http://schemas.microsoft.com/office/drawing/2014/main" id="{CEED29F3-8D38-64E0-ACE3-3415E2E91228}"/>
+              </a:ext>
+            </a:extLst>
+          </p:cNvPr>
           <p:cNvSpPr>
             <a:spLocks noGrp="1"/>
           </p:cNvSpPr>
@@ -527,7 +546,13 @@
       </p:sp>
       <p:sp>
         <p:nvSpPr>
-          <p:cNvPr id="4" name="Slide Number Placeholder 3"/>
+          <p:cNvPr id="4" name="Slide Number Placeholder 3">
+            <a:extLst>
+              <a:ext uri="{FF2B5EF4-FFF2-40B4-BE49-F238E27FC236}">
+                <a16:creationId xmlns:a16="http://schemas.microsoft.com/office/drawing/2014/main" id="{CE9A9F0F-1D22-00A5-BFCB-91473C30C551}"/>
+              </a:ext>
+            </a:extLst>
+          </p:cNvPr>
           <p:cNvSpPr>
             <a:spLocks noGrp="1"/>
           </p:cNvSpPr>
@@ -551,7 +576,7 @@
     </p:spTree>
     <p:extLst>
       <p:ext uri="{BB962C8B-B14F-4D97-AF65-F5344CB8AC3E}">
-        <p14:creationId xmlns:p14="http://schemas.microsoft.com/office/powerpoint/2010/main" val="2727069485"/>
+        <p14:creationId xmlns:p14="http://schemas.microsoft.com/office/powerpoint/2010/main" val="2793356707"/>
       </p:ext>
     </p:extLst>
   </p:cSld>
@@ -650,7 +675,7 @@
           <a:p>
             <a:fld id="{7800A8EB-D570-0148-990C-09AE14B2BF1B}" type="slidenum">
               <a:rPr lang="en-US" smtClean="0"/>
-              <a:t>14</a:t>
+              <a:t>15</a:t>
             </a:fld>
             <a:endParaRPr lang="en-US"/>
           </a:p>
@@ -670,6 +695,414 @@
 </file>
 
 <file path=ppt/notesSlides/notesSlide2.xml><?xml version="1.0" encoding="utf-8"?>
+<p:notes xmlns:a="http://schemas.openxmlformats.org/drawingml/2006/main" xmlns:r="http://schemas.openxmlformats.org/officeDocument/2006/relationships" xmlns:p="http://schemas.openxmlformats.org/presentationml/2006/main">
+  <p:cSld>
+    <p:spTree>
+      <p:nvGrpSpPr>
+        <p:cNvPr id="1" name="">
+          <a:extLst>
+            <a:ext uri="{FF2B5EF4-FFF2-40B4-BE49-F238E27FC236}">
+              <a16:creationId xmlns:a16="http://schemas.microsoft.com/office/drawing/2014/main" id="{90F4E474-E966-7459-92B8-47DD864F3D86}"/>
+            </a:ext>
+          </a:extLst>
+        </p:cNvPr>
+        <p:cNvGrpSpPr/>
+        <p:nvPr/>
+      </p:nvGrpSpPr>
+      <p:grpSpPr>
+        <a:xfrm>
+          <a:off x="0" y="0"/>
+          <a:ext cx="0" cy="0"/>
+          <a:chOff x="0" y="0"/>
+          <a:chExt cx="0" cy="0"/>
+        </a:xfrm>
+      </p:grpSpPr>
+      <p:sp>
+        <p:nvSpPr>
+          <p:cNvPr id="2" name="Slide Image Placeholder 1">
+            <a:extLst>
+              <a:ext uri="{FF2B5EF4-FFF2-40B4-BE49-F238E27FC236}">
+                <a16:creationId xmlns:a16="http://schemas.microsoft.com/office/drawing/2014/main" id="{B738B725-57FB-41AE-8FC9-20ACB708E999}"/>
+              </a:ext>
+            </a:extLst>
+          </p:cNvPr>
+          <p:cNvSpPr>
+            <a:spLocks noGrp="1" noRot="1" noChangeAspect="1"/>
+          </p:cNvSpPr>
+          <p:nvPr>
+            <p:ph type="sldImg"/>
+          </p:nvPr>
+        </p:nvSpPr>
+        <p:spPr/>
+      </p:sp>
+      <p:sp>
+        <p:nvSpPr>
+          <p:cNvPr id="3" name="Notes Placeholder 2">
+            <a:extLst>
+              <a:ext uri="{FF2B5EF4-FFF2-40B4-BE49-F238E27FC236}">
+                <a16:creationId xmlns:a16="http://schemas.microsoft.com/office/drawing/2014/main" id="{830C8954-C50F-D4EB-5B2E-93EEFF772E24}"/>
+              </a:ext>
+            </a:extLst>
+          </p:cNvPr>
+          <p:cNvSpPr>
+            <a:spLocks noGrp="1"/>
+          </p:cNvSpPr>
+          <p:nvPr>
+            <p:ph type="body" idx="1"/>
+          </p:nvPr>
+        </p:nvSpPr>
+        <p:spPr/>
+        <p:txBody>
+          <a:bodyPr/>
+          <a:lstStyle/>
+          <a:p>
+            <a:endParaRPr lang="en-US" dirty="0"/>
+          </a:p>
+        </p:txBody>
+      </p:sp>
+      <p:sp>
+        <p:nvSpPr>
+          <p:cNvPr id="4" name="Slide Number Placeholder 3">
+            <a:extLst>
+              <a:ext uri="{FF2B5EF4-FFF2-40B4-BE49-F238E27FC236}">
+                <a16:creationId xmlns:a16="http://schemas.microsoft.com/office/drawing/2014/main" id="{3D654A37-41CF-5477-E74B-5F14EAF7893F}"/>
+              </a:ext>
+            </a:extLst>
+          </p:cNvPr>
+          <p:cNvSpPr>
+            <a:spLocks noGrp="1"/>
+          </p:cNvSpPr>
+          <p:nvPr>
+            <p:ph type="sldNum" sz="quarter" idx="5"/>
+          </p:nvPr>
+        </p:nvSpPr>
+        <p:spPr/>
+        <p:txBody>
+          <a:bodyPr/>
+          <a:lstStyle/>
+          <a:p>
+            <a:fld id="{7800A8EB-D570-0148-990C-09AE14B2BF1B}" type="slidenum">
+              <a:rPr lang="en-US" smtClean="0"/>
+              <a:t>6</a:t>
+            </a:fld>
+            <a:endParaRPr lang="en-US"/>
+          </a:p>
+        </p:txBody>
+      </p:sp>
+    </p:spTree>
+    <p:extLst>
+      <p:ext uri="{BB962C8B-B14F-4D97-AF65-F5344CB8AC3E}">
+        <p14:creationId xmlns:p14="http://schemas.microsoft.com/office/powerpoint/2010/main" val="482939245"/>
+      </p:ext>
+    </p:extLst>
+  </p:cSld>
+  <p:clrMapOvr>
+    <a:masterClrMapping/>
+  </p:clrMapOvr>
+</p:notes>
+</file>
+
+<file path=ppt/notesSlides/notesSlide3.xml><?xml version="1.0" encoding="utf-8"?>
+<p:notes xmlns:a="http://schemas.openxmlformats.org/drawingml/2006/main" xmlns:r="http://schemas.openxmlformats.org/officeDocument/2006/relationships" xmlns:p="http://schemas.openxmlformats.org/presentationml/2006/main">
+  <p:cSld>
+    <p:spTree>
+      <p:nvGrpSpPr>
+        <p:cNvPr id="1" name="">
+          <a:extLst>
+            <a:ext uri="{FF2B5EF4-FFF2-40B4-BE49-F238E27FC236}">
+              <a16:creationId xmlns:a16="http://schemas.microsoft.com/office/drawing/2014/main" id="{3CB6BDD4-DD1B-8982-3314-FFEC0C5546D6}"/>
+            </a:ext>
+          </a:extLst>
+        </p:cNvPr>
+        <p:cNvGrpSpPr/>
+        <p:nvPr/>
+      </p:nvGrpSpPr>
+      <p:grpSpPr>
+        <a:xfrm>
+          <a:off x="0" y="0"/>
+          <a:ext cx="0" cy="0"/>
+          <a:chOff x="0" y="0"/>
+          <a:chExt cx="0" cy="0"/>
+        </a:xfrm>
+      </p:grpSpPr>
+      <p:sp>
+        <p:nvSpPr>
+          <p:cNvPr id="2" name="Slide Image Placeholder 1">
+            <a:extLst>
+              <a:ext uri="{FF2B5EF4-FFF2-40B4-BE49-F238E27FC236}">
+                <a16:creationId xmlns:a16="http://schemas.microsoft.com/office/drawing/2014/main" id="{99948CBE-715B-BAB6-4025-330366AF8FAE}"/>
+              </a:ext>
+            </a:extLst>
+          </p:cNvPr>
+          <p:cNvSpPr>
+            <a:spLocks noGrp="1" noRot="1" noChangeAspect="1"/>
+          </p:cNvSpPr>
+          <p:nvPr>
+            <p:ph type="sldImg"/>
+          </p:nvPr>
+        </p:nvSpPr>
+        <p:spPr/>
+      </p:sp>
+      <p:sp>
+        <p:nvSpPr>
+          <p:cNvPr id="3" name="Notes Placeholder 2">
+            <a:extLst>
+              <a:ext uri="{FF2B5EF4-FFF2-40B4-BE49-F238E27FC236}">
+                <a16:creationId xmlns:a16="http://schemas.microsoft.com/office/drawing/2014/main" id="{4B0C845A-412E-9ECE-D489-8E9947D94CF7}"/>
+              </a:ext>
+            </a:extLst>
+          </p:cNvPr>
+          <p:cNvSpPr>
+            <a:spLocks noGrp="1"/>
+          </p:cNvSpPr>
+          <p:nvPr>
+            <p:ph type="body" idx="1"/>
+          </p:nvPr>
+        </p:nvSpPr>
+        <p:spPr/>
+        <p:txBody>
+          <a:bodyPr/>
+          <a:lstStyle/>
+          <a:p>
+            <a:endParaRPr lang="en-US" dirty="0"/>
+          </a:p>
+        </p:txBody>
+      </p:sp>
+      <p:sp>
+        <p:nvSpPr>
+          <p:cNvPr id="4" name="Slide Number Placeholder 3">
+            <a:extLst>
+              <a:ext uri="{FF2B5EF4-FFF2-40B4-BE49-F238E27FC236}">
+                <a16:creationId xmlns:a16="http://schemas.microsoft.com/office/drawing/2014/main" id="{71E174F3-6627-6BA4-DADD-A51B431E778B}"/>
+              </a:ext>
+            </a:extLst>
+          </p:cNvPr>
+          <p:cNvSpPr>
+            <a:spLocks noGrp="1"/>
+          </p:cNvSpPr>
+          <p:nvPr>
+            <p:ph type="sldNum" sz="quarter" idx="5"/>
+          </p:nvPr>
+        </p:nvSpPr>
+        <p:spPr/>
+        <p:txBody>
+          <a:bodyPr/>
+          <a:lstStyle/>
+          <a:p>
+            <a:fld id="{7800A8EB-D570-0148-990C-09AE14B2BF1B}" type="slidenum">
+              <a:rPr lang="en-US" smtClean="0"/>
+              <a:t>7</a:t>
+            </a:fld>
+            <a:endParaRPr lang="en-US"/>
+          </a:p>
+        </p:txBody>
+      </p:sp>
+    </p:spTree>
+    <p:extLst>
+      <p:ext uri="{BB962C8B-B14F-4D97-AF65-F5344CB8AC3E}">
+        <p14:creationId xmlns:p14="http://schemas.microsoft.com/office/powerpoint/2010/main" val="3263677914"/>
+      </p:ext>
+    </p:extLst>
+  </p:cSld>
+  <p:clrMapOvr>
+    <a:masterClrMapping/>
+  </p:clrMapOvr>
+</p:notes>
+</file>
+
+<file path=ppt/notesSlides/notesSlide4.xml><?xml version="1.0" encoding="utf-8"?>
+<p:notes xmlns:a="http://schemas.openxmlformats.org/drawingml/2006/main" xmlns:r="http://schemas.openxmlformats.org/officeDocument/2006/relationships" xmlns:p="http://schemas.openxmlformats.org/presentationml/2006/main">
+  <p:cSld>
+    <p:spTree>
+      <p:nvGrpSpPr>
+        <p:cNvPr id="1" name="">
+          <a:extLst>
+            <a:ext uri="{FF2B5EF4-FFF2-40B4-BE49-F238E27FC236}">
+              <a16:creationId xmlns:a16="http://schemas.microsoft.com/office/drawing/2014/main" id="{B2F5FD6A-D7BE-E966-3348-439E974FB2B0}"/>
+            </a:ext>
+          </a:extLst>
+        </p:cNvPr>
+        <p:cNvGrpSpPr/>
+        <p:nvPr/>
+      </p:nvGrpSpPr>
+      <p:grpSpPr>
+        <a:xfrm>
+          <a:off x="0" y="0"/>
+          <a:ext cx="0" cy="0"/>
+          <a:chOff x="0" y="0"/>
+          <a:chExt cx="0" cy="0"/>
+        </a:xfrm>
+      </p:grpSpPr>
+      <p:sp>
+        <p:nvSpPr>
+          <p:cNvPr id="2" name="Slide Image Placeholder 1">
+            <a:extLst>
+              <a:ext uri="{FF2B5EF4-FFF2-40B4-BE49-F238E27FC236}">
+                <a16:creationId xmlns:a16="http://schemas.microsoft.com/office/drawing/2014/main" id="{5EF772D0-E137-FC52-58C5-2B73367FF140}"/>
+              </a:ext>
+            </a:extLst>
+          </p:cNvPr>
+          <p:cNvSpPr>
+            <a:spLocks noGrp="1" noRot="1" noChangeAspect="1"/>
+          </p:cNvSpPr>
+          <p:nvPr>
+            <p:ph type="sldImg"/>
+          </p:nvPr>
+        </p:nvSpPr>
+        <p:spPr/>
+      </p:sp>
+      <p:sp>
+        <p:nvSpPr>
+          <p:cNvPr id="3" name="Notes Placeholder 2">
+            <a:extLst>
+              <a:ext uri="{FF2B5EF4-FFF2-40B4-BE49-F238E27FC236}">
+                <a16:creationId xmlns:a16="http://schemas.microsoft.com/office/drawing/2014/main" id="{3B1D03FF-603D-2713-8FA1-6AF76C501C79}"/>
+              </a:ext>
+            </a:extLst>
+          </p:cNvPr>
+          <p:cNvSpPr>
+            <a:spLocks noGrp="1"/>
+          </p:cNvSpPr>
+          <p:nvPr>
+            <p:ph type="body" idx="1"/>
+          </p:nvPr>
+        </p:nvSpPr>
+        <p:spPr/>
+        <p:txBody>
+          <a:bodyPr/>
+          <a:lstStyle/>
+          <a:p>
+            <a:endParaRPr lang="en-US" dirty="0"/>
+          </a:p>
+        </p:txBody>
+      </p:sp>
+      <p:sp>
+        <p:nvSpPr>
+          <p:cNvPr id="4" name="Slide Number Placeholder 3">
+            <a:extLst>
+              <a:ext uri="{FF2B5EF4-FFF2-40B4-BE49-F238E27FC236}">
+                <a16:creationId xmlns:a16="http://schemas.microsoft.com/office/drawing/2014/main" id="{26265A1D-4C60-DC06-CBA2-5F4A4208E5A8}"/>
+              </a:ext>
+            </a:extLst>
+          </p:cNvPr>
+          <p:cNvSpPr>
+            <a:spLocks noGrp="1"/>
+          </p:cNvSpPr>
+          <p:nvPr>
+            <p:ph type="sldNum" sz="quarter" idx="5"/>
+          </p:nvPr>
+        </p:nvSpPr>
+        <p:spPr/>
+        <p:txBody>
+          <a:bodyPr/>
+          <a:lstStyle/>
+          <a:p>
+            <a:fld id="{7800A8EB-D570-0148-990C-09AE14B2BF1B}" type="slidenum">
+              <a:rPr lang="en-US" smtClean="0"/>
+              <a:t>8</a:t>
+            </a:fld>
+            <a:endParaRPr lang="en-US"/>
+          </a:p>
+        </p:txBody>
+      </p:sp>
+    </p:spTree>
+    <p:extLst>
+      <p:ext uri="{BB962C8B-B14F-4D97-AF65-F5344CB8AC3E}">
+        <p14:creationId xmlns:p14="http://schemas.microsoft.com/office/powerpoint/2010/main" val="3496605011"/>
+      </p:ext>
+    </p:extLst>
+  </p:cSld>
+  <p:clrMapOvr>
+    <a:masterClrMapping/>
+  </p:clrMapOvr>
+</p:notes>
+</file>
+
+<file path=ppt/notesSlides/notesSlide5.xml><?xml version="1.0" encoding="utf-8"?>
+<p:notes xmlns:a="http://schemas.openxmlformats.org/drawingml/2006/main" xmlns:r="http://schemas.openxmlformats.org/officeDocument/2006/relationships" xmlns:p="http://schemas.openxmlformats.org/presentationml/2006/main">
+  <p:cSld>
+    <p:spTree>
+      <p:nvGrpSpPr>
+        <p:cNvPr id="1" name=""/>
+        <p:cNvGrpSpPr/>
+        <p:nvPr/>
+      </p:nvGrpSpPr>
+      <p:grpSpPr>
+        <a:xfrm>
+          <a:off x="0" y="0"/>
+          <a:ext cx="0" cy="0"/>
+          <a:chOff x="0" y="0"/>
+          <a:chExt cx="0" cy="0"/>
+        </a:xfrm>
+      </p:grpSpPr>
+      <p:sp>
+        <p:nvSpPr>
+          <p:cNvPr id="2" name="Slide Image Placeholder 1"/>
+          <p:cNvSpPr>
+            <a:spLocks noGrp="1" noRot="1" noChangeAspect="1"/>
+          </p:cNvSpPr>
+          <p:nvPr>
+            <p:ph type="sldImg"/>
+          </p:nvPr>
+        </p:nvSpPr>
+        <p:spPr/>
+      </p:sp>
+      <p:sp>
+        <p:nvSpPr>
+          <p:cNvPr id="3" name="Notes Placeholder 2"/>
+          <p:cNvSpPr>
+            <a:spLocks noGrp="1"/>
+          </p:cNvSpPr>
+          <p:nvPr>
+            <p:ph type="body" idx="1"/>
+          </p:nvPr>
+        </p:nvSpPr>
+        <p:spPr/>
+        <p:txBody>
+          <a:bodyPr/>
+          <a:lstStyle/>
+          <a:p>
+            <a:endParaRPr lang="en-US" dirty="0"/>
+          </a:p>
+        </p:txBody>
+      </p:sp>
+      <p:sp>
+        <p:nvSpPr>
+          <p:cNvPr id="4" name="Slide Number Placeholder 3"/>
+          <p:cNvSpPr>
+            <a:spLocks noGrp="1"/>
+          </p:cNvSpPr>
+          <p:nvPr>
+            <p:ph type="sldNum" sz="quarter" idx="5"/>
+          </p:nvPr>
+        </p:nvSpPr>
+        <p:spPr/>
+        <p:txBody>
+          <a:bodyPr/>
+          <a:lstStyle/>
+          <a:p>
+            <a:fld id="{7800A8EB-D570-0148-990C-09AE14B2BF1B}" type="slidenum">
+              <a:rPr lang="en-US" smtClean="0"/>
+              <a:t>10</a:t>
+            </a:fld>
+            <a:endParaRPr lang="en-US"/>
+          </a:p>
+        </p:txBody>
+      </p:sp>
+    </p:spTree>
+    <p:extLst>
+      <p:ext uri="{BB962C8B-B14F-4D97-AF65-F5344CB8AC3E}">
+        <p14:creationId xmlns:p14="http://schemas.microsoft.com/office/powerpoint/2010/main" val="2727069485"/>
+      </p:ext>
+    </p:extLst>
+  </p:cSld>
+  <p:clrMapOvr>
+    <a:masterClrMapping/>
+  </p:clrMapOvr>
+</p:notes>
+</file>
+
+<file path=ppt/notesSlides/notesSlide6.xml><?xml version="1.0" encoding="utf-8"?>
 <p:notes xmlns:a="http://schemas.openxmlformats.org/drawingml/2006/main" xmlns:r="http://schemas.openxmlformats.org/officeDocument/2006/relationships" xmlns:p="http://schemas.openxmlformats.org/presentationml/2006/main">
   <p:cSld>
     <p:spTree>
@@ -758,7 +1191,7 @@
           <a:p>
             <a:fld id="{7800A8EB-D570-0148-990C-09AE14B2BF1B}" type="slidenum">
               <a:rPr lang="en-US" smtClean="0"/>
-              <a:t>6</a:t>
+              <a:t>11</a:t>
             </a:fld>
             <a:endParaRPr lang="en-US"/>
           </a:p>
@@ -777,7 +1210,7 @@
 </p:notes>
 </file>
 
-<file path=ppt/notesSlides/notesSlide3.xml><?xml version="1.0" encoding="utf-8"?>
+<file path=ppt/notesSlides/notesSlide7.xml><?xml version="1.0" encoding="utf-8"?>
 <p:notes xmlns:a="http://schemas.openxmlformats.org/drawingml/2006/main" xmlns:r="http://schemas.openxmlformats.org/officeDocument/2006/relationships" xmlns:p="http://schemas.openxmlformats.org/presentationml/2006/main">
   <p:cSld>
     <p:spTree>
@@ -866,7 +1299,7 @@
           <a:p>
             <a:fld id="{7800A8EB-D570-0148-990C-09AE14B2BF1B}" type="slidenum">
               <a:rPr lang="en-US" smtClean="0"/>
-              <a:t>7</a:t>
+              <a:t>12</a:t>
             </a:fld>
             <a:endParaRPr lang="en-US"/>
           </a:p>
@@ -885,7 +1318,7 @@
 </p:notes>
 </file>
 
-<file path=ppt/notesSlides/notesSlide4.xml><?xml version="1.0" encoding="utf-8"?>
+<file path=ppt/notesSlides/notesSlide8.xml><?xml version="1.0" encoding="utf-8"?>
 <p:notes xmlns:a="http://schemas.openxmlformats.org/drawingml/2006/main" xmlns:r="http://schemas.openxmlformats.org/officeDocument/2006/relationships" xmlns:p="http://schemas.openxmlformats.org/presentationml/2006/main">
   <p:cSld>
     <p:spTree>
@@ -974,7 +1407,7 @@
           <a:p>
             <a:fld id="{7800A8EB-D570-0148-990C-09AE14B2BF1B}" type="slidenum">
               <a:rPr lang="en-US" smtClean="0"/>
-              <a:t>8</a:t>
+              <a:t>13</a:t>
             </a:fld>
             <a:endParaRPr lang="en-US"/>
           </a:p>
@@ -984,438 +1417,6 @@
     <p:extLst>
       <p:ext uri="{BB962C8B-B14F-4D97-AF65-F5344CB8AC3E}">
         <p14:creationId xmlns:p14="http://schemas.microsoft.com/office/powerpoint/2010/main" val="2055148226"/>
-      </p:ext>
-    </p:extLst>
-  </p:cSld>
-  <p:clrMapOvr>
-    <a:masterClrMapping/>
-  </p:clrMapOvr>
-</p:notes>
-</file>
-
-<file path=ppt/notesSlides/notesSlide5.xml><?xml version="1.0" encoding="utf-8"?>
-<p:notes xmlns:a="http://schemas.openxmlformats.org/drawingml/2006/main" xmlns:r="http://schemas.openxmlformats.org/officeDocument/2006/relationships" xmlns:p="http://schemas.openxmlformats.org/presentationml/2006/main">
-  <p:cSld>
-    <p:spTree>
-      <p:nvGrpSpPr>
-        <p:cNvPr id="1" name="">
-          <a:extLst>
-            <a:ext uri="{FF2B5EF4-FFF2-40B4-BE49-F238E27FC236}">
-              <a16:creationId xmlns:a16="http://schemas.microsoft.com/office/drawing/2014/main" id="{F5CA2136-0894-C8EA-C247-5ABA0023523B}"/>
-            </a:ext>
-          </a:extLst>
-        </p:cNvPr>
-        <p:cNvGrpSpPr/>
-        <p:nvPr/>
-      </p:nvGrpSpPr>
-      <p:grpSpPr>
-        <a:xfrm>
-          <a:off x="0" y="0"/>
-          <a:ext cx="0" cy="0"/>
-          <a:chOff x="0" y="0"/>
-          <a:chExt cx="0" cy="0"/>
-        </a:xfrm>
-      </p:grpSpPr>
-      <p:sp>
-        <p:nvSpPr>
-          <p:cNvPr id="2" name="Slide Image Placeholder 1">
-            <a:extLst>
-              <a:ext uri="{FF2B5EF4-FFF2-40B4-BE49-F238E27FC236}">
-                <a16:creationId xmlns:a16="http://schemas.microsoft.com/office/drawing/2014/main" id="{08C97905-150F-F874-8060-891F3C8BF2BD}"/>
-              </a:ext>
-            </a:extLst>
-          </p:cNvPr>
-          <p:cNvSpPr>
-            <a:spLocks noGrp="1" noRot="1" noChangeAspect="1"/>
-          </p:cNvSpPr>
-          <p:nvPr>
-            <p:ph type="sldImg"/>
-          </p:nvPr>
-        </p:nvSpPr>
-        <p:spPr/>
-      </p:sp>
-      <p:sp>
-        <p:nvSpPr>
-          <p:cNvPr id="3" name="Notes Placeholder 2">
-            <a:extLst>
-              <a:ext uri="{FF2B5EF4-FFF2-40B4-BE49-F238E27FC236}">
-                <a16:creationId xmlns:a16="http://schemas.microsoft.com/office/drawing/2014/main" id="{CEED29F3-8D38-64E0-ACE3-3415E2E91228}"/>
-              </a:ext>
-            </a:extLst>
-          </p:cNvPr>
-          <p:cNvSpPr>
-            <a:spLocks noGrp="1"/>
-          </p:cNvSpPr>
-          <p:nvPr>
-            <p:ph type="body" idx="1"/>
-          </p:nvPr>
-        </p:nvSpPr>
-        <p:spPr/>
-        <p:txBody>
-          <a:bodyPr/>
-          <a:lstStyle/>
-          <a:p>
-            <a:endParaRPr lang="en-US" dirty="0"/>
-          </a:p>
-        </p:txBody>
-      </p:sp>
-      <p:sp>
-        <p:nvSpPr>
-          <p:cNvPr id="4" name="Slide Number Placeholder 3">
-            <a:extLst>
-              <a:ext uri="{FF2B5EF4-FFF2-40B4-BE49-F238E27FC236}">
-                <a16:creationId xmlns:a16="http://schemas.microsoft.com/office/drawing/2014/main" id="{CE9A9F0F-1D22-00A5-BFCB-91473C30C551}"/>
-              </a:ext>
-            </a:extLst>
-          </p:cNvPr>
-          <p:cNvSpPr>
-            <a:spLocks noGrp="1"/>
-          </p:cNvSpPr>
-          <p:nvPr>
-            <p:ph type="sldNum" sz="quarter" idx="5"/>
-          </p:nvPr>
-        </p:nvSpPr>
-        <p:spPr/>
-        <p:txBody>
-          <a:bodyPr/>
-          <a:lstStyle/>
-          <a:p>
-            <a:fld id="{7800A8EB-D570-0148-990C-09AE14B2BF1B}" type="slidenum">
-              <a:rPr lang="en-US" smtClean="0"/>
-              <a:t>9</a:t>
-            </a:fld>
-            <a:endParaRPr lang="en-US"/>
-          </a:p>
-        </p:txBody>
-      </p:sp>
-    </p:spTree>
-    <p:extLst>
-      <p:ext uri="{BB962C8B-B14F-4D97-AF65-F5344CB8AC3E}">
-        <p14:creationId xmlns:p14="http://schemas.microsoft.com/office/powerpoint/2010/main" val="2793356707"/>
-      </p:ext>
-    </p:extLst>
-  </p:cSld>
-  <p:clrMapOvr>
-    <a:masterClrMapping/>
-  </p:clrMapOvr>
-</p:notes>
-</file>
-
-<file path=ppt/notesSlides/notesSlide6.xml><?xml version="1.0" encoding="utf-8"?>
-<p:notes xmlns:a="http://schemas.openxmlformats.org/drawingml/2006/main" xmlns:r="http://schemas.openxmlformats.org/officeDocument/2006/relationships" xmlns:p="http://schemas.openxmlformats.org/presentationml/2006/main">
-  <p:cSld>
-    <p:spTree>
-      <p:nvGrpSpPr>
-        <p:cNvPr id="1" name="">
-          <a:extLst>
-            <a:ext uri="{FF2B5EF4-FFF2-40B4-BE49-F238E27FC236}">
-              <a16:creationId xmlns:a16="http://schemas.microsoft.com/office/drawing/2014/main" id="{90F4E474-E966-7459-92B8-47DD864F3D86}"/>
-            </a:ext>
-          </a:extLst>
-        </p:cNvPr>
-        <p:cNvGrpSpPr/>
-        <p:nvPr/>
-      </p:nvGrpSpPr>
-      <p:grpSpPr>
-        <a:xfrm>
-          <a:off x="0" y="0"/>
-          <a:ext cx="0" cy="0"/>
-          <a:chOff x="0" y="0"/>
-          <a:chExt cx="0" cy="0"/>
-        </a:xfrm>
-      </p:grpSpPr>
-      <p:sp>
-        <p:nvSpPr>
-          <p:cNvPr id="2" name="Slide Image Placeholder 1">
-            <a:extLst>
-              <a:ext uri="{FF2B5EF4-FFF2-40B4-BE49-F238E27FC236}">
-                <a16:creationId xmlns:a16="http://schemas.microsoft.com/office/drawing/2014/main" id="{B738B725-57FB-41AE-8FC9-20ACB708E999}"/>
-              </a:ext>
-            </a:extLst>
-          </p:cNvPr>
-          <p:cNvSpPr>
-            <a:spLocks noGrp="1" noRot="1" noChangeAspect="1"/>
-          </p:cNvSpPr>
-          <p:nvPr>
-            <p:ph type="sldImg"/>
-          </p:nvPr>
-        </p:nvSpPr>
-        <p:spPr/>
-      </p:sp>
-      <p:sp>
-        <p:nvSpPr>
-          <p:cNvPr id="3" name="Notes Placeholder 2">
-            <a:extLst>
-              <a:ext uri="{FF2B5EF4-FFF2-40B4-BE49-F238E27FC236}">
-                <a16:creationId xmlns:a16="http://schemas.microsoft.com/office/drawing/2014/main" id="{830C8954-C50F-D4EB-5B2E-93EEFF772E24}"/>
-              </a:ext>
-            </a:extLst>
-          </p:cNvPr>
-          <p:cNvSpPr>
-            <a:spLocks noGrp="1"/>
-          </p:cNvSpPr>
-          <p:nvPr>
-            <p:ph type="body" idx="1"/>
-          </p:nvPr>
-        </p:nvSpPr>
-        <p:spPr/>
-        <p:txBody>
-          <a:bodyPr/>
-          <a:lstStyle/>
-          <a:p>
-            <a:endParaRPr lang="en-US" dirty="0"/>
-          </a:p>
-        </p:txBody>
-      </p:sp>
-      <p:sp>
-        <p:nvSpPr>
-          <p:cNvPr id="4" name="Slide Number Placeholder 3">
-            <a:extLst>
-              <a:ext uri="{FF2B5EF4-FFF2-40B4-BE49-F238E27FC236}">
-                <a16:creationId xmlns:a16="http://schemas.microsoft.com/office/drawing/2014/main" id="{3D654A37-41CF-5477-E74B-5F14EAF7893F}"/>
-              </a:ext>
-            </a:extLst>
-          </p:cNvPr>
-          <p:cNvSpPr>
-            <a:spLocks noGrp="1"/>
-          </p:cNvSpPr>
-          <p:nvPr>
-            <p:ph type="sldNum" sz="quarter" idx="5"/>
-          </p:nvPr>
-        </p:nvSpPr>
-        <p:spPr/>
-        <p:txBody>
-          <a:bodyPr/>
-          <a:lstStyle/>
-          <a:p>
-            <a:fld id="{7800A8EB-D570-0148-990C-09AE14B2BF1B}" type="slidenum">
-              <a:rPr lang="en-US" smtClean="0"/>
-              <a:t>10</a:t>
-            </a:fld>
-            <a:endParaRPr lang="en-US"/>
-          </a:p>
-        </p:txBody>
-      </p:sp>
-    </p:spTree>
-    <p:extLst>
-      <p:ext uri="{BB962C8B-B14F-4D97-AF65-F5344CB8AC3E}">
-        <p14:creationId xmlns:p14="http://schemas.microsoft.com/office/powerpoint/2010/main" val="482939245"/>
-      </p:ext>
-    </p:extLst>
-  </p:cSld>
-  <p:clrMapOvr>
-    <a:masterClrMapping/>
-  </p:clrMapOvr>
-</p:notes>
-</file>
-
-<file path=ppt/notesSlides/notesSlide7.xml><?xml version="1.0" encoding="utf-8"?>
-<p:notes xmlns:a="http://schemas.openxmlformats.org/drawingml/2006/main" xmlns:r="http://schemas.openxmlformats.org/officeDocument/2006/relationships" xmlns:p="http://schemas.openxmlformats.org/presentationml/2006/main">
-  <p:cSld>
-    <p:spTree>
-      <p:nvGrpSpPr>
-        <p:cNvPr id="1" name="">
-          <a:extLst>
-            <a:ext uri="{FF2B5EF4-FFF2-40B4-BE49-F238E27FC236}">
-              <a16:creationId xmlns:a16="http://schemas.microsoft.com/office/drawing/2014/main" id="{3CB6BDD4-DD1B-8982-3314-FFEC0C5546D6}"/>
-            </a:ext>
-          </a:extLst>
-        </p:cNvPr>
-        <p:cNvGrpSpPr/>
-        <p:nvPr/>
-      </p:nvGrpSpPr>
-      <p:grpSpPr>
-        <a:xfrm>
-          <a:off x="0" y="0"/>
-          <a:ext cx="0" cy="0"/>
-          <a:chOff x="0" y="0"/>
-          <a:chExt cx="0" cy="0"/>
-        </a:xfrm>
-      </p:grpSpPr>
-      <p:sp>
-        <p:nvSpPr>
-          <p:cNvPr id="2" name="Slide Image Placeholder 1">
-            <a:extLst>
-              <a:ext uri="{FF2B5EF4-FFF2-40B4-BE49-F238E27FC236}">
-                <a16:creationId xmlns:a16="http://schemas.microsoft.com/office/drawing/2014/main" id="{99948CBE-715B-BAB6-4025-330366AF8FAE}"/>
-              </a:ext>
-            </a:extLst>
-          </p:cNvPr>
-          <p:cNvSpPr>
-            <a:spLocks noGrp="1" noRot="1" noChangeAspect="1"/>
-          </p:cNvSpPr>
-          <p:nvPr>
-            <p:ph type="sldImg"/>
-          </p:nvPr>
-        </p:nvSpPr>
-        <p:spPr/>
-      </p:sp>
-      <p:sp>
-        <p:nvSpPr>
-          <p:cNvPr id="3" name="Notes Placeholder 2">
-            <a:extLst>
-              <a:ext uri="{FF2B5EF4-FFF2-40B4-BE49-F238E27FC236}">
-                <a16:creationId xmlns:a16="http://schemas.microsoft.com/office/drawing/2014/main" id="{4B0C845A-412E-9ECE-D489-8E9947D94CF7}"/>
-              </a:ext>
-            </a:extLst>
-          </p:cNvPr>
-          <p:cNvSpPr>
-            <a:spLocks noGrp="1"/>
-          </p:cNvSpPr>
-          <p:nvPr>
-            <p:ph type="body" idx="1"/>
-          </p:nvPr>
-        </p:nvSpPr>
-        <p:spPr/>
-        <p:txBody>
-          <a:bodyPr/>
-          <a:lstStyle/>
-          <a:p>
-            <a:endParaRPr lang="en-US" dirty="0"/>
-          </a:p>
-        </p:txBody>
-      </p:sp>
-      <p:sp>
-        <p:nvSpPr>
-          <p:cNvPr id="4" name="Slide Number Placeholder 3">
-            <a:extLst>
-              <a:ext uri="{FF2B5EF4-FFF2-40B4-BE49-F238E27FC236}">
-                <a16:creationId xmlns:a16="http://schemas.microsoft.com/office/drawing/2014/main" id="{71E174F3-6627-6BA4-DADD-A51B431E778B}"/>
-              </a:ext>
-            </a:extLst>
-          </p:cNvPr>
-          <p:cNvSpPr>
-            <a:spLocks noGrp="1"/>
-          </p:cNvSpPr>
-          <p:nvPr>
-            <p:ph type="sldNum" sz="quarter" idx="5"/>
-          </p:nvPr>
-        </p:nvSpPr>
-        <p:spPr/>
-        <p:txBody>
-          <a:bodyPr/>
-          <a:lstStyle/>
-          <a:p>
-            <a:fld id="{7800A8EB-D570-0148-990C-09AE14B2BF1B}" type="slidenum">
-              <a:rPr lang="en-US" smtClean="0"/>
-              <a:t>11</a:t>
-            </a:fld>
-            <a:endParaRPr lang="en-US"/>
-          </a:p>
-        </p:txBody>
-      </p:sp>
-    </p:spTree>
-    <p:extLst>
-      <p:ext uri="{BB962C8B-B14F-4D97-AF65-F5344CB8AC3E}">
-        <p14:creationId xmlns:p14="http://schemas.microsoft.com/office/powerpoint/2010/main" val="3263677914"/>
-      </p:ext>
-    </p:extLst>
-  </p:cSld>
-  <p:clrMapOvr>
-    <a:masterClrMapping/>
-  </p:clrMapOvr>
-</p:notes>
-</file>
-
-<file path=ppt/notesSlides/notesSlide8.xml><?xml version="1.0" encoding="utf-8"?>
-<p:notes xmlns:a="http://schemas.openxmlformats.org/drawingml/2006/main" xmlns:r="http://schemas.openxmlformats.org/officeDocument/2006/relationships" xmlns:p="http://schemas.openxmlformats.org/presentationml/2006/main">
-  <p:cSld>
-    <p:spTree>
-      <p:nvGrpSpPr>
-        <p:cNvPr id="1" name="">
-          <a:extLst>
-            <a:ext uri="{FF2B5EF4-FFF2-40B4-BE49-F238E27FC236}">
-              <a16:creationId xmlns:a16="http://schemas.microsoft.com/office/drawing/2014/main" id="{B2F5FD6A-D7BE-E966-3348-439E974FB2B0}"/>
-            </a:ext>
-          </a:extLst>
-        </p:cNvPr>
-        <p:cNvGrpSpPr/>
-        <p:nvPr/>
-      </p:nvGrpSpPr>
-      <p:grpSpPr>
-        <a:xfrm>
-          <a:off x="0" y="0"/>
-          <a:ext cx="0" cy="0"/>
-          <a:chOff x="0" y="0"/>
-          <a:chExt cx="0" cy="0"/>
-        </a:xfrm>
-      </p:grpSpPr>
-      <p:sp>
-        <p:nvSpPr>
-          <p:cNvPr id="2" name="Slide Image Placeholder 1">
-            <a:extLst>
-              <a:ext uri="{FF2B5EF4-FFF2-40B4-BE49-F238E27FC236}">
-                <a16:creationId xmlns:a16="http://schemas.microsoft.com/office/drawing/2014/main" id="{5EF772D0-E137-FC52-58C5-2B73367FF140}"/>
-              </a:ext>
-            </a:extLst>
-          </p:cNvPr>
-          <p:cNvSpPr>
-            <a:spLocks noGrp="1" noRot="1" noChangeAspect="1"/>
-          </p:cNvSpPr>
-          <p:nvPr>
-            <p:ph type="sldImg"/>
-          </p:nvPr>
-        </p:nvSpPr>
-        <p:spPr/>
-      </p:sp>
-      <p:sp>
-        <p:nvSpPr>
-          <p:cNvPr id="3" name="Notes Placeholder 2">
-            <a:extLst>
-              <a:ext uri="{FF2B5EF4-FFF2-40B4-BE49-F238E27FC236}">
-                <a16:creationId xmlns:a16="http://schemas.microsoft.com/office/drawing/2014/main" id="{3B1D03FF-603D-2713-8FA1-6AF76C501C79}"/>
-              </a:ext>
-            </a:extLst>
-          </p:cNvPr>
-          <p:cNvSpPr>
-            <a:spLocks noGrp="1"/>
-          </p:cNvSpPr>
-          <p:nvPr>
-            <p:ph type="body" idx="1"/>
-          </p:nvPr>
-        </p:nvSpPr>
-        <p:spPr/>
-        <p:txBody>
-          <a:bodyPr/>
-          <a:lstStyle/>
-          <a:p>
-            <a:endParaRPr lang="en-US" dirty="0"/>
-          </a:p>
-        </p:txBody>
-      </p:sp>
-      <p:sp>
-        <p:nvSpPr>
-          <p:cNvPr id="4" name="Slide Number Placeholder 3">
-            <a:extLst>
-              <a:ext uri="{FF2B5EF4-FFF2-40B4-BE49-F238E27FC236}">
-                <a16:creationId xmlns:a16="http://schemas.microsoft.com/office/drawing/2014/main" id="{26265A1D-4C60-DC06-CBA2-5F4A4208E5A8}"/>
-              </a:ext>
-            </a:extLst>
-          </p:cNvPr>
-          <p:cNvSpPr>
-            <a:spLocks noGrp="1"/>
-          </p:cNvSpPr>
-          <p:nvPr>
-            <p:ph type="sldNum" sz="quarter" idx="5"/>
-          </p:nvPr>
-        </p:nvSpPr>
-        <p:spPr/>
-        <p:txBody>
-          <a:bodyPr/>
-          <a:lstStyle/>
-          <a:p>
-            <a:fld id="{7800A8EB-D570-0148-990C-09AE14B2BF1B}" type="slidenum">
-              <a:rPr lang="en-US" smtClean="0"/>
-              <a:t>12</a:t>
-            </a:fld>
-            <a:endParaRPr lang="en-US"/>
-          </a:p>
-        </p:txBody>
-      </p:sp>
-    </p:spTree>
-    <p:extLst>
-      <p:ext uri="{BB962C8B-B14F-4D97-AF65-F5344CB8AC3E}">
-        <p14:creationId xmlns:p14="http://schemas.microsoft.com/office/powerpoint/2010/main" val="3496605011"/>
       </p:ext>
     </p:extLst>
   </p:cSld>
@@ -1514,7 +1515,7 @@
           <a:p>
             <a:fld id="{7800A8EB-D570-0148-990C-09AE14B2BF1B}" type="slidenum">
               <a:rPr lang="en-US" smtClean="0"/>
-              <a:t>13</a:t>
+              <a:t>14</a:t>
             </a:fld>
             <a:endParaRPr lang="en-US"/>
           </a:p>
@@ -1680,7 +1681,7 @@
           <a:p>
             <a:fld id="{12AE367A-FB30-8045-9E97-AC53B9EF1DC1}" type="datetimeFigureOut">
               <a:rPr lang="en-US" smtClean="0"/>
-              <a:t>8/21/26</a:t>
+              <a:t>9/30/26</a:t>
             </a:fld>
             <a:endParaRPr lang="en-US"/>
           </a:p>
@@ -1878,7 +1879,7 @@
           <a:p>
             <a:fld id="{12AE367A-FB30-8045-9E97-AC53B9EF1DC1}" type="datetimeFigureOut">
               <a:rPr lang="en-US" smtClean="0"/>
-              <a:t>8/21/26</a:t>
+              <a:t>9/30/26</a:t>
             </a:fld>
             <a:endParaRPr lang="en-US"/>
           </a:p>
@@ -2086,7 +2087,7 @@
           <a:p>
             <a:fld id="{12AE367A-FB30-8045-9E97-AC53B9EF1DC1}" type="datetimeFigureOut">
               <a:rPr lang="en-US" smtClean="0"/>
-              <a:t>8/21/26</a:t>
+              <a:t>9/30/26</a:t>
             </a:fld>
             <a:endParaRPr lang="en-US"/>
           </a:p>
@@ -2284,7 +2285,7 @@
           <a:p>
             <a:fld id="{12AE367A-FB30-8045-9E97-AC53B9EF1DC1}" type="datetimeFigureOut">
               <a:rPr lang="en-US" smtClean="0"/>
-              <a:t>8/21/26</a:t>
+              <a:t>9/30/26</a:t>
             </a:fld>
             <a:endParaRPr lang="en-US"/>
           </a:p>
@@ -2559,7 +2560,7 @@
           <a:p>
             <a:fld id="{12AE367A-FB30-8045-9E97-AC53B9EF1DC1}" type="datetimeFigureOut">
               <a:rPr lang="en-US" smtClean="0"/>
-              <a:t>8/21/26</a:t>
+              <a:t>9/30/26</a:t>
             </a:fld>
             <a:endParaRPr lang="en-US"/>
           </a:p>
@@ -2824,7 +2825,7 @@
           <a:p>
             <a:fld id="{12AE367A-FB30-8045-9E97-AC53B9EF1DC1}" type="datetimeFigureOut">
               <a:rPr lang="en-US" smtClean="0"/>
-              <a:t>8/21/26</a:t>
+              <a:t>9/30/26</a:t>
             </a:fld>
             <a:endParaRPr lang="en-US"/>
           </a:p>
@@ -3236,7 +3237,7 @@
           <a:p>
             <a:fld id="{12AE367A-FB30-8045-9E97-AC53B9EF1DC1}" type="datetimeFigureOut">
               <a:rPr lang="en-US" smtClean="0"/>
-              <a:t>8/21/26</a:t>
+              <a:t>9/30/26</a:t>
             </a:fld>
             <a:endParaRPr lang="en-US"/>
           </a:p>
@@ -3377,7 +3378,7 @@
           <a:p>
             <a:fld id="{12AE367A-FB30-8045-9E97-AC53B9EF1DC1}" type="datetimeFigureOut">
               <a:rPr lang="en-US" smtClean="0"/>
-              <a:t>8/21/26</a:t>
+              <a:t>9/30/26</a:t>
             </a:fld>
             <a:endParaRPr lang="en-US"/>
           </a:p>
@@ -3490,7 +3491,7 @@
           <a:p>
             <a:fld id="{12AE367A-FB30-8045-9E97-AC53B9EF1DC1}" type="datetimeFigureOut">
               <a:rPr lang="en-US" smtClean="0"/>
-              <a:t>8/21/26</a:t>
+              <a:t>9/30/26</a:t>
             </a:fld>
             <a:endParaRPr lang="en-US"/>
           </a:p>
@@ -3801,7 +3802,7 @@
           <a:p>
             <a:fld id="{12AE367A-FB30-8045-9E97-AC53B9EF1DC1}" type="datetimeFigureOut">
               <a:rPr lang="en-US" smtClean="0"/>
-              <a:t>8/21/26</a:t>
+              <a:t>9/30/26</a:t>
             </a:fld>
             <a:endParaRPr lang="en-US"/>
           </a:p>
@@ -4089,7 +4090,7 @@
           <a:p>
             <a:fld id="{12AE367A-FB30-8045-9E97-AC53B9EF1DC1}" type="datetimeFigureOut">
               <a:rPr lang="en-US" smtClean="0"/>
-              <a:t>8/21/26</a:t>
+              <a:t>9/30/26</a:t>
             </a:fld>
             <a:endParaRPr lang="en-US"/>
           </a:p>
@@ -4330,7 +4331,7 @@
           <a:p>
             <a:fld id="{12AE367A-FB30-8045-9E97-AC53B9EF1DC1}" type="datetimeFigureOut">
               <a:rPr lang="en-US" smtClean="0"/>
-              <a:t>8/21/26</a:t>
+              <a:t>9/30/26</a:t>
             </a:fld>
             <a:endParaRPr lang="en-US"/>
           </a:p>
@@ -5063,6 +5064,2062 @@
         <p:cNvPr id="1" name="">
           <a:extLst>
             <a:ext uri="{FF2B5EF4-FFF2-40B4-BE49-F238E27FC236}">
+              <a16:creationId xmlns:a16="http://schemas.microsoft.com/office/drawing/2014/main" id="{29A2AB72-0ECB-4F7C-DF53-96F1F7EE414B}"/>
+            </a:ext>
+          </a:extLst>
+        </p:cNvPr>
+        <p:cNvGrpSpPr/>
+        <p:nvPr/>
+      </p:nvGrpSpPr>
+      <p:grpSpPr>
+        <a:xfrm>
+          <a:off x="0" y="0"/>
+          <a:ext cx="0" cy="0"/>
+          <a:chOff x="0" y="0"/>
+          <a:chExt cx="0" cy="0"/>
+        </a:xfrm>
+      </p:grpSpPr>
+      <p:sp>
+        <p:nvSpPr>
+          <p:cNvPr id="2" name="Title 1">
+            <a:extLst>
+              <a:ext uri="{FF2B5EF4-FFF2-40B4-BE49-F238E27FC236}">
+                <a16:creationId xmlns:a16="http://schemas.microsoft.com/office/drawing/2014/main" id="{63B64FA0-FFCC-D680-6851-22A029380F7F}"/>
+              </a:ext>
+            </a:extLst>
+          </p:cNvPr>
+          <p:cNvSpPr>
+            <a:spLocks noGrp="1"/>
+          </p:cNvSpPr>
+          <p:nvPr>
+            <p:ph type="title"/>
+          </p:nvPr>
+        </p:nvSpPr>
+        <p:spPr/>
+        <p:txBody>
+          <a:bodyPr/>
+          <a:lstStyle/>
+          <a:p>
+            <a:r>
+              <a:rPr lang="en-US" dirty="0"/>
+              <a:t>Introduction to Machine Learning</a:t>
+            </a:r>
+          </a:p>
+        </p:txBody>
+      </p:sp>
+      <p:pic>
+        <p:nvPicPr>
+          <p:cNvPr id="1026" name="Picture 2" descr="Example of classification problem">
+            <a:extLst>
+              <a:ext uri="{FF2B5EF4-FFF2-40B4-BE49-F238E27FC236}">
+                <a16:creationId xmlns:a16="http://schemas.microsoft.com/office/drawing/2014/main" id="{6A9E8852-A955-28A2-85BD-D89AE1E05E2E}"/>
+              </a:ext>
+            </a:extLst>
+          </p:cNvPr>
+          <p:cNvPicPr>
+            <a:picLocks noChangeAspect="1" noChangeArrowheads="1"/>
+          </p:cNvPicPr>
+          <p:nvPr/>
+        </p:nvPicPr>
+        <p:blipFill>
+          <a:blip r:embed="rId3"/>
+          <a:srcRect/>
+          <a:stretch/>
+        </p:blipFill>
+        <p:spPr bwMode="auto">
+          <a:xfrm>
+            <a:off x="7372865" y="2150076"/>
+            <a:ext cx="5369184" cy="4026888"/>
+          </a:xfrm>
+          <a:prstGeom prst="rect">
+            <a:avLst/>
+          </a:prstGeom>
+          <a:noFill/>
+          <a:extLst>
+            <a:ext uri="{909E8E84-426E-40DD-AFC4-6F175D3DCCD1}">
+              <a14:hiddenFill xmlns:a14="http://schemas.microsoft.com/office/drawing/2010/main">
+                <a:solidFill>
+                  <a:srgbClr val="FFFFFF"/>
+                </a:solidFill>
+              </a14:hiddenFill>
+            </a:ext>
+          </a:extLst>
+        </p:spPr>
+      </p:pic>
+      <p:sp>
+        <p:nvSpPr>
+          <p:cNvPr id="3" name="Content Placeholder 2">
+            <a:extLst>
+              <a:ext uri="{FF2B5EF4-FFF2-40B4-BE49-F238E27FC236}">
+                <a16:creationId xmlns:a16="http://schemas.microsoft.com/office/drawing/2014/main" id="{CA337AE6-333C-9277-3169-A200A26FCEE3}"/>
+              </a:ext>
+            </a:extLst>
+          </p:cNvPr>
+          <p:cNvSpPr>
+            <a:spLocks noGrp="1"/>
+          </p:cNvSpPr>
+          <p:nvPr>
+            <p:ph idx="1"/>
+          </p:nvPr>
+        </p:nvSpPr>
+        <p:spPr>
+          <a:xfrm>
+            <a:off x="838200" y="1825625"/>
+            <a:ext cx="6827874" cy="4351338"/>
+          </a:xfrm>
+        </p:spPr>
+        <p:txBody>
+          <a:bodyPr>
+            <a:normAutofit/>
+          </a:bodyPr>
+          <a:lstStyle/>
+          <a:p>
+            <a:pPr marL="0" indent="0">
+              <a:buNone/>
+            </a:pPr>
+            <a:r>
+              <a:rPr lang="en-US" b="1" dirty="0"/>
+              <a:t>Classification</a:t>
+            </a:r>
+            <a:r>
+              <a:rPr lang="en-US" dirty="0"/>
+              <a:t> – Predicting discrete labels</a:t>
+            </a:r>
+          </a:p>
+          <a:p>
+            <a:pPr marL="0" indent="0">
+              <a:buNone/>
+            </a:pPr>
+            <a:endParaRPr lang="en-US" dirty="0"/>
+          </a:p>
+          <a:p>
+            <a:pPr marL="0" indent="0">
+              <a:buNone/>
+            </a:pPr>
+            <a:r>
+              <a:rPr lang="en-US" dirty="0"/>
+              <a:t>The objective of the classification problem is to define a boundary in the feature space that can separate the classes. This boundary can be a line or a more complex shape.</a:t>
+            </a:r>
+          </a:p>
+          <a:p>
+            <a:pPr marL="0" indent="0">
+              <a:buNone/>
+            </a:pPr>
+            <a:r>
+              <a:rPr lang="en-US" dirty="0"/>
+              <a:t>Classification problems usually have more than two features, so the separation in the feature space might not be intuitive. </a:t>
+            </a:r>
+          </a:p>
+        </p:txBody>
+      </p:sp>
+    </p:spTree>
+    <p:extLst>
+      <p:ext uri="{BB962C8B-B14F-4D97-AF65-F5344CB8AC3E}">
+        <p14:creationId xmlns:p14="http://schemas.microsoft.com/office/powerpoint/2010/main" val="2541717111"/>
+      </p:ext>
+    </p:extLst>
+  </p:cSld>
+  <p:clrMapOvr>
+    <a:masterClrMapping/>
+  </p:clrMapOvr>
+</p:sld>
+</file>
+
+<file path=ppt/slides/slide11.xml><?xml version="1.0" encoding="utf-8"?>
+<p:sld xmlns:a="http://schemas.openxmlformats.org/drawingml/2006/main" xmlns:r="http://schemas.openxmlformats.org/officeDocument/2006/relationships" xmlns:p="http://schemas.openxmlformats.org/presentationml/2006/main">
+  <p:cSld>
+    <p:spTree>
+      <p:nvGrpSpPr>
+        <p:cNvPr id="1" name="">
+          <a:extLst>
+            <a:ext uri="{FF2B5EF4-FFF2-40B4-BE49-F238E27FC236}">
+              <a16:creationId xmlns:a16="http://schemas.microsoft.com/office/drawing/2014/main" id="{2DA81951-8CD5-61DE-ABD8-9D3ABF19F871}"/>
+            </a:ext>
+          </a:extLst>
+        </p:cNvPr>
+        <p:cNvGrpSpPr/>
+        <p:nvPr/>
+      </p:nvGrpSpPr>
+      <p:grpSpPr>
+        <a:xfrm>
+          <a:off x="0" y="0"/>
+          <a:ext cx="0" cy="0"/>
+          <a:chOff x="0" y="0"/>
+          <a:chExt cx="0" cy="0"/>
+        </a:xfrm>
+      </p:grpSpPr>
+      <p:sp>
+        <p:nvSpPr>
+          <p:cNvPr id="2" name="Title 1">
+            <a:extLst>
+              <a:ext uri="{FF2B5EF4-FFF2-40B4-BE49-F238E27FC236}">
+                <a16:creationId xmlns:a16="http://schemas.microsoft.com/office/drawing/2014/main" id="{8930CFA4-5270-F3BA-DDC6-572A00A886DB}"/>
+              </a:ext>
+            </a:extLst>
+          </p:cNvPr>
+          <p:cNvSpPr>
+            <a:spLocks noGrp="1"/>
+          </p:cNvSpPr>
+          <p:nvPr>
+            <p:ph type="title"/>
+          </p:nvPr>
+        </p:nvSpPr>
+        <p:spPr/>
+        <p:txBody>
+          <a:bodyPr/>
+          <a:lstStyle/>
+          <a:p>
+            <a:r>
+              <a:rPr lang="en-US" dirty="0"/>
+              <a:t>Introduction to Machine Learning</a:t>
+            </a:r>
+          </a:p>
+        </p:txBody>
+      </p:sp>
+      <p:sp>
+        <p:nvSpPr>
+          <p:cNvPr id="3" name="Content Placeholder 2">
+            <a:extLst>
+              <a:ext uri="{FF2B5EF4-FFF2-40B4-BE49-F238E27FC236}">
+                <a16:creationId xmlns:a16="http://schemas.microsoft.com/office/drawing/2014/main" id="{6586ECCB-B928-FFCC-315B-11DEB13EBB57}"/>
+              </a:ext>
+            </a:extLst>
+          </p:cNvPr>
+          <p:cNvSpPr>
+            <a:spLocks noGrp="1"/>
+          </p:cNvSpPr>
+          <p:nvPr>
+            <p:ph idx="1"/>
+          </p:nvPr>
+        </p:nvSpPr>
+        <p:spPr>
+          <a:xfrm>
+            <a:off x="838200" y="1825625"/>
+            <a:ext cx="6687065" cy="4351338"/>
+          </a:xfrm>
+        </p:spPr>
+        <p:txBody>
+          <a:bodyPr>
+            <a:normAutofit/>
+          </a:bodyPr>
+          <a:lstStyle/>
+          <a:p>
+            <a:pPr marL="0" indent="0">
+              <a:buNone/>
+            </a:pPr>
+            <a:r>
+              <a:rPr lang="en-US" b="1" dirty="0"/>
+              <a:t>Classification</a:t>
+            </a:r>
+            <a:r>
+              <a:rPr lang="en-US" dirty="0"/>
+              <a:t> – Predicting discrete labels</a:t>
+            </a:r>
+          </a:p>
+          <a:p>
+            <a:pPr marL="0" indent="0">
+              <a:buNone/>
+            </a:pPr>
+            <a:endParaRPr lang="en-US" dirty="0"/>
+          </a:p>
+          <a:p>
+            <a:pPr marL="0" indent="0">
+              <a:buNone/>
+            </a:pPr>
+            <a:r>
+              <a:rPr lang="en-US" dirty="0"/>
+              <a:t>Once the boundary is defined, we can use it to classify new data that does not have a label. </a:t>
+            </a:r>
+          </a:p>
+          <a:p>
+            <a:pPr marL="0" indent="0">
+              <a:buNone/>
+            </a:pPr>
+            <a:endParaRPr lang="en-US" dirty="0"/>
+          </a:p>
+          <a:p>
+            <a:pPr marL="0" indent="0">
+              <a:buNone/>
+            </a:pPr>
+            <a:r>
+              <a:rPr lang="en-US" dirty="0"/>
+              <a:t>What is the label of the black dot ? </a:t>
+            </a:r>
+          </a:p>
+          <a:p>
+            <a:pPr marL="0" indent="0">
+              <a:buNone/>
+            </a:pPr>
+            <a:r>
+              <a:rPr lang="en-US" dirty="0"/>
+              <a:t>What is the label of the green dot ? </a:t>
+            </a:r>
+          </a:p>
+          <a:p>
+            <a:pPr marL="0" indent="0">
+              <a:buNone/>
+            </a:pPr>
+            <a:endParaRPr lang="en-US" dirty="0"/>
+          </a:p>
+        </p:txBody>
+      </p:sp>
+      <p:pic>
+        <p:nvPicPr>
+          <p:cNvPr id="1026" name="Picture 2" descr="Example of classification problem">
+            <a:extLst>
+              <a:ext uri="{FF2B5EF4-FFF2-40B4-BE49-F238E27FC236}">
+                <a16:creationId xmlns:a16="http://schemas.microsoft.com/office/drawing/2014/main" id="{818E14B7-2FD5-F4E6-4A70-8BF24656903A}"/>
+              </a:ext>
+            </a:extLst>
+          </p:cNvPr>
+          <p:cNvPicPr>
+            <a:picLocks noChangeAspect="1" noChangeArrowheads="1"/>
+          </p:cNvPicPr>
+          <p:nvPr/>
+        </p:nvPicPr>
+        <p:blipFill>
+          <a:blip r:embed="rId3"/>
+          <a:srcRect/>
+          <a:stretch/>
+        </p:blipFill>
+        <p:spPr bwMode="auto">
+          <a:xfrm>
+            <a:off x="7372865" y="2150076"/>
+            <a:ext cx="5369184" cy="4026888"/>
+          </a:xfrm>
+          <a:prstGeom prst="rect">
+            <a:avLst/>
+          </a:prstGeom>
+          <a:noFill/>
+          <a:extLst>
+            <a:ext uri="{909E8E84-426E-40DD-AFC4-6F175D3DCCD1}">
+              <a14:hiddenFill xmlns:a14="http://schemas.microsoft.com/office/drawing/2010/main">
+                <a:solidFill>
+                  <a:srgbClr val="FFFFFF"/>
+                </a:solidFill>
+              </a14:hiddenFill>
+            </a:ext>
+          </a:extLst>
+        </p:spPr>
+      </p:pic>
+      <p:sp>
+        <p:nvSpPr>
+          <p:cNvPr id="4" name="Oval 3">
+            <a:extLst>
+              <a:ext uri="{FF2B5EF4-FFF2-40B4-BE49-F238E27FC236}">
+                <a16:creationId xmlns:a16="http://schemas.microsoft.com/office/drawing/2014/main" id="{3FA54BF1-D1C8-675D-B57D-5C99E4A4F739}"/>
+              </a:ext>
+            </a:extLst>
+          </p:cNvPr>
+          <p:cNvSpPr/>
+          <p:nvPr/>
+        </p:nvSpPr>
+        <p:spPr>
+          <a:xfrm>
+            <a:off x="11557591" y="4401879"/>
+            <a:ext cx="91440" cy="91440"/>
+          </a:xfrm>
+          <a:prstGeom prst="ellipse">
+            <a:avLst/>
+          </a:prstGeom>
+          <a:solidFill>
+            <a:schemeClr val="tx1"/>
+          </a:solidFill>
+        </p:spPr>
+        <p:style>
+          <a:lnRef idx="2">
+            <a:schemeClr val="accent1">
+              <a:shade val="15000"/>
+            </a:schemeClr>
+          </a:lnRef>
+          <a:fillRef idx="1">
+            <a:schemeClr val="accent1"/>
+          </a:fillRef>
+          <a:effectRef idx="0">
+            <a:schemeClr val="accent1"/>
+          </a:effectRef>
+          <a:fontRef idx="minor">
+            <a:schemeClr val="lt1"/>
+          </a:fontRef>
+        </p:style>
+        <p:txBody>
+          <a:bodyPr rtlCol="0" anchor="ctr"/>
+          <a:lstStyle/>
+          <a:p>
+            <a:pPr algn="ctr"/>
+            <a:endParaRPr lang="en-US"/>
+          </a:p>
+        </p:txBody>
+      </p:sp>
+      <p:cxnSp>
+        <p:nvCxnSpPr>
+          <p:cNvPr id="6" name="Straight Arrow Connector 5">
+            <a:extLst>
+              <a:ext uri="{FF2B5EF4-FFF2-40B4-BE49-F238E27FC236}">
+                <a16:creationId xmlns:a16="http://schemas.microsoft.com/office/drawing/2014/main" id="{38285FCB-8A52-4597-49F6-924B36BF7861}"/>
+              </a:ext>
+            </a:extLst>
+          </p:cNvPr>
+          <p:cNvCxnSpPr/>
+          <p:nvPr/>
+        </p:nvCxnSpPr>
+        <p:spPr>
+          <a:xfrm flipH="1">
+            <a:off x="11649031" y="3338623"/>
+            <a:ext cx="642206" cy="978196"/>
+          </a:xfrm>
+          <a:prstGeom prst="straightConnector1">
+            <a:avLst/>
+          </a:prstGeom>
+          <a:ln w="38100">
+            <a:solidFill>
+              <a:srgbClr val="FF0000"/>
+            </a:solidFill>
+            <a:tailEnd type="triangle"/>
+          </a:ln>
+        </p:spPr>
+        <p:style>
+          <a:lnRef idx="2">
+            <a:schemeClr val="accent1"/>
+          </a:lnRef>
+          <a:fillRef idx="0">
+            <a:schemeClr val="accent1"/>
+          </a:fillRef>
+          <a:effectRef idx="1">
+            <a:schemeClr val="accent1"/>
+          </a:effectRef>
+          <a:fontRef idx="minor">
+            <a:schemeClr val="tx1"/>
+          </a:fontRef>
+        </p:style>
+      </p:cxnSp>
+      <p:sp>
+        <p:nvSpPr>
+          <p:cNvPr id="7" name="Oval 6">
+            <a:extLst>
+              <a:ext uri="{FF2B5EF4-FFF2-40B4-BE49-F238E27FC236}">
+                <a16:creationId xmlns:a16="http://schemas.microsoft.com/office/drawing/2014/main" id="{6A3107A5-C854-2893-E7A7-201B21680119}"/>
+              </a:ext>
+            </a:extLst>
+          </p:cNvPr>
+          <p:cNvSpPr/>
+          <p:nvPr/>
+        </p:nvSpPr>
+        <p:spPr>
+          <a:xfrm rot="17651866">
+            <a:off x="10908858" y="4051401"/>
+            <a:ext cx="91440" cy="91440"/>
+          </a:xfrm>
+          <a:prstGeom prst="ellipse">
+            <a:avLst/>
+          </a:prstGeom>
+          <a:solidFill>
+            <a:schemeClr val="accent6"/>
+          </a:solidFill>
+        </p:spPr>
+        <p:style>
+          <a:lnRef idx="2">
+            <a:schemeClr val="accent1">
+              <a:shade val="15000"/>
+            </a:schemeClr>
+          </a:lnRef>
+          <a:fillRef idx="1">
+            <a:schemeClr val="accent1"/>
+          </a:fillRef>
+          <a:effectRef idx="0">
+            <a:schemeClr val="accent1"/>
+          </a:effectRef>
+          <a:fontRef idx="minor">
+            <a:schemeClr val="lt1"/>
+          </a:fontRef>
+        </p:style>
+        <p:txBody>
+          <a:bodyPr rtlCol="0" anchor="ctr"/>
+          <a:lstStyle/>
+          <a:p>
+            <a:pPr algn="ctr"/>
+            <a:endParaRPr lang="en-US"/>
+          </a:p>
+        </p:txBody>
+      </p:sp>
+      <p:cxnSp>
+        <p:nvCxnSpPr>
+          <p:cNvPr id="8" name="Straight Arrow Connector 7">
+            <a:extLst>
+              <a:ext uri="{FF2B5EF4-FFF2-40B4-BE49-F238E27FC236}">
+                <a16:creationId xmlns:a16="http://schemas.microsoft.com/office/drawing/2014/main" id="{868AC9F4-B3C1-EF70-AAB2-51BFE740A978}"/>
+              </a:ext>
+            </a:extLst>
+          </p:cNvPr>
+          <p:cNvCxnSpPr/>
+          <p:nvPr/>
+        </p:nvCxnSpPr>
+        <p:spPr>
+          <a:xfrm flipH="1">
+            <a:off x="11006825" y="3037317"/>
+            <a:ext cx="642206" cy="978196"/>
+          </a:xfrm>
+          <a:prstGeom prst="straightConnector1">
+            <a:avLst/>
+          </a:prstGeom>
+          <a:ln w="38100">
+            <a:solidFill>
+              <a:srgbClr val="FF0000"/>
+            </a:solidFill>
+            <a:tailEnd type="triangle"/>
+          </a:ln>
+        </p:spPr>
+        <p:style>
+          <a:lnRef idx="2">
+            <a:schemeClr val="accent1"/>
+          </a:lnRef>
+          <a:fillRef idx="0">
+            <a:schemeClr val="accent1"/>
+          </a:fillRef>
+          <a:effectRef idx="1">
+            <a:schemeClr val="accent1"/>
+          </a:effectRef>
+          <a:fontRef idx="minor">
+            <a:schemeClr val="tx1"/>
+          </a:fontRef>
+        </p:style>
+      </p:cxnSp>
+    </p:spTree>
+    <p:extLst>
+      <p:ext uri="{BB962C8B-B14F-4D97-AF65-F5344CB8AC3E}">
+        <p14:creationId xmlns:p14="http://schemas.microsoft.com/office/powerpoint/2010/main" val="2227557205"/>
+      </p:ext>
+    </p:extLst>
+  </p:cSld>
+  <p:clrMapOvr>
+    <a:masterClrMapping/>
+  </p:clrMapOvr>
+</p:sld>
+</file>
+
+<file path=ppt/slides/slide12.xml><?xml version="1.0" encoding="utf-8"?>
+<p:sld xmlns:a="http://schemas.openxmlformats.org/drawingml/2006/main" xmlns:r="http://schemas.openxmlformats.org/officeDocument/2006/relationships" xmlns:p="http://schemas.openxmlformats.org/presentationml/2006/main">
+  <p:cSld>
+    <p:spTree>
+      <p:nvGrpSpPr>
+        <p:cNvPr id="1" name="">
+          <a:extLst>
+            <a:ext uri="{FF2B5EF4-FFF2-40B4-BE49-F238E27FC236}">
+              <a16:creationId xmlns:a16="http://schemas.microsoft.com/office/drawing/2014/main" id="{54C1DE8E-3377-DEC3-8D5A-FA2D4C3A2240}"/>
+            </a:ext>
+          </a:extLst>
+        </p:cNvPr>
+        <p:cNvGrpSpPr/>
+        <p:nvPr/>
+      </p:nvGrpSpPr>
+      <p:grpSpPr>
+        <a:xfrm>
+          <a:off x="0" y="0"/>
+          <a:ext cx="0" cy="0"/>
+          <a:chOff x="0" y="0"/>
+          <a:chExt cx="0" cy="0"/>
+        </a:xfrm>
+      </p:grpSpPr>
+      <p:sp>
+        <p:nvSpPr>
+          <p:cNvPr id="2" name="Title 1">
+            <a:extLst>
+              <a:ext uri="{FF2B5EF4-FFF2-40B4-BE49-F238E27FC236}">
+                <a16:creationId xmlns:a16="http://schemas.microsoft.com/office/drawing/2014/main" id="{6C723770-35F4-D6D7-31C5-93AE798B24E2}"/>
+              </a:ext>
+            </a:extLst>
+          </p:cNvPr>
+          <p:cNvSpPr>
+            <a:spLocks noGrp="1"/>
+          </p:cNvSpPr>
+          <p:nvPr>
+            <p:ph type="title"/>
+          </p:nvPr>
+        </p:nvSpPr>
+        <p:spPr/>
+        <p:txBody>
+          <a:bodyPr/>
+          <a:lstStyle/>
+          <a:p>
+            <a:r>
+              <a:rPr lang="en-US" dirty="0"/>
+              <a:t>Introduction to Machine Learning</a:t>
+            </a:r>
+          </a:p>
+        </p:txBody>
+      </p:sp>
+      <p:sp>
+        <p:nvSpPr>
+          <p:cNvPr id="3" name="Content Placeholder 2">
+            <a:extLst>
+              <a:ext uri="{FF2B5EF4-FFF2-40B4-BE49-F238E27FC236}">
+                <a16:creationId xmlns:a16="http://schemas.microsoft.com/office/drawing/2014/main" id="{E9171420-17AD-AA41-68B7-A0FB2536EF24}"/>
+              </a:ext>
+            </a:extLst>
+          </p:cNvPr>
+          <p:cNvSpPr>
+            <a:spLocks noGrp="1"/>
+          </p:cNvSpPr>
+          <p:nvPr>
+            <p:ph idx="1"/>
+          </p:nvPr>
+        </p:nvSpPr>
+        <p:spPr>
+          <a:xfrm>
+            <a:off x="838200" y="1825625"/>
+            <a:ext cx="6687065" cy="4351338"/>
+          </a:xfrm>
+        </p:spPr>
+        <p:txBody>
+          <a:bodyPr>
+            <a:normAutofit/>
+          </a:bodyPr>
+          <a:lstStyle/>
+          <a:p>
+            <a:pPr marL="0" indent="0">
+              <a:buNone/>
+            </a:pPr>
+            <a:r>
+              <a:rPr lang="en-US" b="1" dirty="0"/>
+              <a:t>Classification</a:t>
+            </a:r>
+            <a:r>
+              <a:rPr lang="en-US" dirty="0"/>
+              <a:t> – Predicting discrete labels</a:t>
+            </a:r>
+          </a:p>
+          <a:p>
+            <a:pPr marL="0" indent="0">
+              <a:buNone/>
+            </a:pPr>
+            <a:endParaRPr lang="en-US" dirty="0"/>
+          </a:p>
+          <a:p>
+            <a:pPr marL="0" indent="0">
+              <a:buNone/>
+            </a:pPr>
+            <a:r>
+              <a:rPr lang="en-US" dirty="0"/>
+              <a:t>Not all classification problems are linearly separable, we will learn methods that can learn non-linear boundaries to separate the data. </a:t>
+            </a:r>
+          </a:p>
+          <a:p>
+            <a:pPr marL="0" indent="0">
+              <a:buNone/>
+            </a:pPr>
+            <a:endParaRPr lang="en-US" dirty="0"/>
+          </a:p>
+        </p:txBody>
+      </p:sp>
+      <p:pic>
+        <p:nvPicPr>
+          <p:cNvPr id="3074" name="Picture 2" descr="Example of classification problem">
+            <a:extLst>
+              <a:ext uri="{FF2B5EF4-FFF2-40B4-BE49-F238E27FC236}">
+                <a16:creationId xmlns:a16="http://schemas.microsoft.com/office/drawing/2014/main" id="{722F887F-A016-2147-2B55-9CAC23872DC5}"/>
+              </a:ext>
+            </a:extLst>
+          </p:cNvPr>
+          <p:cNvPicPr>
+            <a:picLocks noChangeAspect="1" noChangeArrowheads="1"/>
+          </p:cNvPicPr>
+          <p:nvPr/>
+        </p:nvPicPr>
+        <p:blipFill>
+          <a:blip r:embed="rId3">
+            <a:extLst>
+              <a:ext uri="{28A0092B-C50C-407E-A947-70E740481C1C}">
+                <a14:useLocalDpi xmlns:a14="http://schemas.microsoft.com/office/drawing/2010/main" val="0"/>
+              </a:ext>
+            </a:extLst>
+          </a:blip>
+          <a:srcRect/>
+          <a:stretch>
+            <a:fillRect/>
+          </a:stretch>
+        </p:blipFill>
+        <p:spPr bwMode="auto">
+          <a:xfrm>
+            <a:off x="7375503" y="1825625"/>
+            <a:ext cx="5008880" cy="4933507"/>
+          </a:xfrm>
+          <a:prstGeom prst="rect">
+            <a:avLst/>
+          </a:prstGeom>
+          <a:noFill/>
+          <a:extLst>
+            <a:ext uri="{909E8E84-426E-40DD-AFC4-6F175D3DCCD1}">
+              <a14:hiddenFill xmlns:a14="http://schemas.microsoft.com/office/drawing/2010/main">
+                <a:solidFill>
+                  <a:srgbClr val="FFFFFF"/>
+                </a:solidFill>
+              </a14:hiddenFill>
+            </a:ext>
+          </a:extLst>
+        </p:spPr>
+      </p:pic>
+    </p:spTree>
+    <p:extLst>
+      <p:ext uri="{BB962C8B-B14F-4D97-AF65-F5344CB8AC3E}">
+        <p14:creationId xmlns:p14="http://schemas.microsoft.com/office/powerpoint/2010/main" val="1067743693"/>
+      </p:ext>
+    </p:extLst>
+  </p:cSld>
+  <p:clrMapOvr>
+    <a:masterClrMapping/>
+  </p:clrMapOvr>
+</p:sld>
+</file>
+
+<file path=ppt/slides/slide13.xml><?xml version="1.0" encoding="utf-8"?>
+<p:sld xmlns:a="http://schemas.openxmlformats.org/drawingml/2006/main" xmlns:r="http://schemas.openxmlformats.org/officeDocument/2006/relationships" xmlns:p="http://schemas.openxmlformats.org/presentationml/2006/main">
+  <p:cSld>
+    <p:spTree>
+      <p:nvGrpSpPr>
+        <p:cNvPr id="1" name="">
+          <a:extLst>
+            <a:ext uri="{FF2B5EF4-FFF2-40B4-BE49-F238E27FC236}">
+              <a16:creationId xmlns:a16="http://schemas.microsoft.com/office/drawing/2014/main" id="{F9D2BBF8-0D7B-C127-B963-90322B75B1B1}"/>
+            </a:ext>
+          </a:extLst>
+        </p:cNvPr>
+        <p:cNvGrpSpPr/>
+        <p:nvPr/>
+      </p:nvGrpSpPr>
+      <p:grpSpPr>
+        <a:xfrm>
+          <a:off x="0" y="0"/>
+          <a:ext cx="0" cy="0"/>
+          <a:chOff x="0" y="0"/>
+          <a:chExt cx="0" cy="0"/>
+        </a:xfrm>
+      </p:grpSpPr>
+      <p:sp>
+        <p:nvSpPr>
+          <p:cNvPr id="2" name="Title 1">
+            <a:extLst>
+              <a:ext uri="{FF2B5EF4-FFF2-40B4-BE49-F238E27FC236}">
+                <a16:creationId xmlns:a16="http://schemas.microsoft.com/office/drawing/2014/main" id="{B43BC36A-C78D-B23C-B657-4C86EA0BF0B9}"/>
+              </a:ext>
+            </a:extLst>
+          </p:cNvPr>
+          <p:cNvSpPr>
+            <a:spLocks noGrp="1"/>
+          </p:cNvSpPr>
+          <p:nvPr>
+            <p:ph type="title"/>
+          </p:nvPr>
+        </p:nvSpPr>
+        <p:spPr/>
+        <p:txBody>
+          <a:bodyPr/>
+          <a:lstStyle/>
+          <a:p>
+            <a:r>
+              <a:rPr lang="en-US" dirty="0"/>
+              <a:t>Introduction to Machine Learning</a:t>
+            </a:r>
+          </a:p>
+        </p:txBody>
+      </p:sp>
+      <p:sp>
+        <p:nvSpPr>
+          <p:cNvPr id="3" name="Content Placeholder 2">
+            <a:extLst>
+              <a:ext uri="{FF2B5EF4-FFF2-40B4-BE49-F238E27FC236}">
+                <a16:creationId xmlns:a16="http://schemas.microsoft.com/office/drawing/2014/main" id="{EFF6BC4B-EF20-8EB5-D277-38E2F9831068}"/>
+              </a:ext>
+            </a:extLst>
+          </p:cNvPr>
+          <p:cNvSpPr>
+            <a:spLocks noGrp="1"/>
+          </p:cNvSpPr>
+          <p:nvPr>
+            <p:ph idx="1"/>
+          </p:nvPr>
+        </p:nvSpPr>
+        <p:spPr>
+          <a:xfrm>
+            <a:off x="838200" y="1825625"/>
+            <a:ext cx="6687065" cy="4351338"/>
+          </a:xfrm>
+        </p:spPr>
+        <p:txBody>
+          <a:bodyPr>
+            <a:normAutofit/>
+          </a:bodyPr>
+          <a:lstStyle/>
+          <a:p>
+            <a:pPr marL="0" indent="0">
+              <a:buNone/>
+            </a:pPr>
+            <a:r>
+              <a:rPr lang="en-US" b="1" dirty="0"/>
+              <a:t>Classification</a:t>
+            </a:r>
+            <a:r>
+              <a:rPr lang="en-US" dirty="0"/>
+              <a:t> – Predicting discrete labels</a:t>
+            </a:r>
+          </a:p>
+          <a:p>
+            <a:pPr marL="0" indent="0">
+              <a:buNone/>
+            </a:pPr>
+            <a:endParaRPr lang="en-US" dirty="0"/>
+          </a:p>
+          <a:p>
+            <a:pPr marL="0" indent="0">
+              <a:buNone/>
+            </a:pPr>
+            <a:r>
+              <a:rPr lang="en-US" dirty="0"/>
+              <a:t>Not all classification problems are linearly separable, we will learn methods that can learn non-linear boundaries to separate the data. </a:t>
+            </a:r>
+          </a:p>
+          <a:p>
+            <a:pPr marL="0" indent="0">
+              <a:buNone/>
+            </a:pPr>
+            <a:endParaRPr lang="en-US" dirty="0"/>
+          </a:p>
+        </p:txBody>
+      </p:sp>
+      <p:pic>
+        <p:nvPicPr>
+          <p:cNvPr id="3074" name="Picture 2" descr="Example of classification problem">
+            <a:extLst>
+              <a:ext uri="{FF2B5EF4-FFF2-40B4-BE49-F238E27FC236}">
+                <a16:creationId xmlns:a16="http://schemas.microsoft.com/office/drawing/2014/main" id="{79B2745D-FF1F-A59E-C356-4FA2EB0EC3A6}"/>
+              </a:ext>
+            </a:extLst>
+          </p:cNvPr>
+          <p:cNvPicPr>
+            <a:picLocks noChangeAspect="1" noChangeArrowheads="1"/>
+          </p:cNvPicPr>
+          <p:nvPr/>
+        </p:nvPicPr>
+        <p:blipFill>
+          <a:blip r:embed="rId3"/>
+          <a:srcRect/>
+          <a:stretch/>
+        </p:blipFill>
+        <p:spPr bwMode="auto">
+          <a:xfrm>
+            <a:off x="7407288" y="1825625"/>
+            <a:ext cx="4945309" cy="4933507"/>
+          </a:xfrm>
+          <a:prstGeom prst="rect">
+            <a:avLst/>
+          </a:prstGeom>
+          <a:noFill/>
+          <a:extLst>
+            <a:ext uri="{909E8E84-426E-40DD-AFC4-6F175D3DCCD1}">
+              <a14:hiddenFill xmlns:a14="http://schemas.microsoft.com/office/drawing/2010/main">
+                <a:solidFill>
+                  <a:srgbClr val="FFFFFF"/>
+                </a:solidFill>
+              </a14:hiddenFill>
+            </a:ext>
+          </a:extLst>
+        </p:spPr>
+      </p:pic>
+    </p:spTree>
+    <p:extLst>
+      <p:ext uri="{BB962C8B-B14F-4D97-AF65-F5344CB8AC3E}">
+        <p14:creationId xmlns:p14="http://schemas.microsoft.com/office/powerpoint/2010/main" val="1700444571"/>
+      </p:ext>
+    </p:extLst>
+  </p:cSld>
+  <p:clrMapOvr>
+    <a:masterClrMapping/>
+  </p:clrMapOvr>
+</p:sld>
+</file>
+
+<file path=ppt/slides/slide14.xml><?xml version="1.0" encoding="utf-8"?>
+<p:sld xmlns:a="http://schemas.openxmlformats.org/drawingml/2006/main" xmlns:r="http://schemas.openxmlformats.org/officeDocument/2006/relationships" xmlns:p="http://schemas.openxmlformats.org/presentationml/2006/main">
+  <p:cSld>
+    <p:spTree>
+      <p:nvGrpSpPr>
+        <p:cNvPr id="1" name="">
+          <a:extLst>
+            <a:ext uri="{FF2B5EF4-FFF2-40B4-BE49-F238E27FC236}">
+              <a16:creationId xmlns:a16="http://schemas.microsoft.com/office/drawing/2014/main" id="{80675CD3-538D-B366-F33C-6005B0A72D1C}"/>
+            </a:ext>
+          </a:extLst>
+        </p:cNvPr>
+        <p:cNvGrpSpPr/>
+        <p:nvPr/>
+      </p:nvGrpSpPr>
+      <p:grpSpPr>
+        <a:xfrm>
+          <a:off x="0" y="0"/>
+          <a:ext cx="0" cy="0"/>
+          <a:chOff x="0" y="0"/>
+          <a:chExt cx="0" cy="0"/>
+        </a:xfrm>
+      </p:grpSpPr>
+      <p:sp>
+        <p:nvSpPr>
+          <p:cNvPr id="2" name="Title 1">
+            <a:extLst>
+              <a:ext uri="{FF2B5EF4-FFF2-40B4-BE49-F238E27FC236}">
+                <a16:creationId xmlns:a16="http://schemas.microsoft.com/office/drawing/2014/main" id="{6A1BB93D-9D2F-173F-3D72-83378C554C97}"/>
+              </a:ext>
+            </a:extLst>
+          </p:cNvPr>
+          <p:cNvSpPr>
+            <a:spLocks noGrp="1"/>
+          </p:cNvSpPr>
+          <p:nvPr>
+            <p:ph type="title"/>
+          </p:nvPr>
+        </p:nvSpPr>
+        <p:spPr/>
+        <p:txBody>
+          <a:bodyPr/>
+          <a:lstStyle/>
+          <a:p>
+            <a:r>
+              <a:rPr lang="en-US" dirty="0"/>
+              <a:t>Introduction to Machine Learning</a:t>
+            </a:r>
+          </a:p>
+        </p:txBody>
+      </p:sp>
+      <p:sp>
+        <p:nvSpPr>
+          <p:cNvPr id="3" name="Content Placeholder 2">
+            <a:extLst>
+              <a:ext uri="{FF2B5EF4-FFF2-40B4-BE49-F238E27FC236}">
+                <a16:creationId xmlns:a16="http://schemas.microsoft.com/office/drawing/2014/main" id="{802F5377-EDEA-66CB-0055-1EEB73FBA0C7}"/>
+              </a:ext>
+            </a:extLst>
+          </p:cNvPr>
+          <p:cNvSpPr>
+            <a:spLocks noGrp="1"/>
+          </p:cNvSpPr>
+          <p:nvPr>
+            <p:ph idx="1"/>
+          </p:nvPr>
+        </p:nvSpPr>
+        <p:spPr>
+          <a:xfrm>
+            <a:off x="838200" y="1825072"/>
+            <a:ext cx="6696367" cy="4351338"/>
+          </a:xfrm>
+        </p:spPr>
+        <p:txBody>
+          <a:bodyPr>
+            <a:normAutofit fontScale="92500"/>
+          </a:bodyPr>
+          <a:lstStyle/>
+          <a:p>
+            <a:pPr marL="0" indent="0">
+              <a:buNone/>
+            </a:pPr>
+            <a:r>
+              <a:rPr lang="en-US" b="1" dirty="0"/>
+              <a:t>Clustering</a:t>
+            </a:r>
+            <a:r>
+              <a:rPr lang="en-US" dirty="0"/>
+              <a:t> – Inferring labels from data</a:t>
+            </a:r>
+          </a:p>
+          <a:p>
+            <a:pPr marL="0" indent="0">
+              <a:buNone/>
+            </a:pPr>
+            <a:endParaRPr lang="en-US" dirty="0"/>
+          </a:p>
+          <a:p>
+            <a:pPr marL="0" indent="0">
+              <a:buNone/>
+            </a:pPr>
+            <a:r>
+              <a:rPr lang="en-US" dirty="0"/>
+              <a:t>Clustering is a common unsupervised learning problem.  In a clustering problem, the features can typically be separated into different groups.</a:t>
+            </a:r>
+          </a:p>
+          <a:p>
+            <a:pPr marL="0" indent="0">
+              <a:buNone/>
+            </a:pPr>
+            <a:endParaRPr lang="en-US" dirty="0"/>
+          </a:p>
+          <a:p>
+            <a:pPr marL="0" indent="0">
+              <a:buNone/>
+            </a:pPr>
+            <a:r>
+              <a:rPr lang="en-US" dirty="0"/>
+              <a:t>A clustering algorithm will use the structure of the data to determine how many groups are present and the class for each measurement. </a:t>
+            </a:r>
+          </a:p>
+        </p:txBody>
+      </p:sp>
+      <p:pic>
+        <p:nvPicPr>
+          <p:cNvPr id="5" name="Picture 4" descr="Example of clustering problem">
+            <a:extLst>
+              <a:ext uri="{FF2B5EF4-FFF2-40B4-BE49-F238E27FC236}">
+                <a16:creationId xmlns:a16="http://schemas.microsoft.com/office/drawing/2014/main" id="{DB58B566-2249-D766-6E39-8E2EECF701E3}"/>
+              </a:ext>
+            </a:extLst>
+          </p:cNvPr>
+          <p:cNvPicPr>
+            <a:picLocks noChangeAspect="1"/>
+          </p:cNvPicPr>
+          <p:nvPr/>
+        </p:nvPicPr>
+        <p:blipFill>
+          <a:blip r:embed="rId3"/>
+          <a:srcRect/>
+          <a:stretch/>
+        </p:blipFill>
+        <p:spPr>
+          <a:xfrm>
+            <a:off x="7999909" y="2472000"/>
+            <a:ext cx="4250424" cy="3344009"/>
+          </a:xfrm>
+          <a:prstGeom prst="rect">
+            <a:avLst/>
+          </a:prstGeom>
+        </p:spPr>
+      </p:pic>
+    </p:spTree>
+    <p:extLst>
+      <p:ext uri="{BB962C8B-B14F-4D97-AF65-F5344CB8AC3E}">
+        <p14:creationId xmlns:p14="http://schemas.microsoft.com/office/powerpoint/2010/main" val="2660915328"/>
+      </p:ext>
+    </p:extLst>
+  </p:cSld>
+  <p:clrMapOvr>
+    <a:masterClrMapping/>
+  </p:clrMapOvr>
+</p:sld>
+</file>
+
+<file path=ppt/slides/slide15.xml><?xml version="1.0" encoding="utf-8"?>
+<p:sld xmlns:a="http://schemas.openxmlformats.org/drawingml/2006/main" xmlns:r="http://schemas.openxmlformats.org/officeDocument/2006/relationships" xmlns:p="http://schemas.openxmlformats.org/presentationml/2006/main">
+  <p:cSld>
+    <p:spTree>
+      <p:nvGrpSpPr>
+        <p:cNvPr id="1" name="">
+          <a:extLst>
+            <a:ext uri="{FF2B5EF4-FFF2-40B4-BE49-F238E27FC236}">
+              <a16:creationId xmlns:a16="http://schemas.microsoft.com/office/drawing/2014/main" id="{8C77C37D-4090-2E60-5823-56A6D0A386C6}"/>
+            </a:ext>
+          </a:extLst>
+        </p:cNvPr>
+        <p:cNvGrpSpPr/>
+        <p:nvPr/>
+      </p:nvGrpSpPr>
+      <p:grpSpPr>
+        <a:xfrm>
+          <a:off x="0" y="0"/>
+          <a:ext cx="0" cy="0"/>
+          <a:chOff x="0" y="0"/>
+          <a:chExt cx="0" cy="0"/>
+        </a:xfrm>
+      </p:grpSpPr>
+      <p:sp>
+        <p:nvSpPr>
+          <p:cNvPr id="2" name="Title 1">
+            <a:extLst>
+              <a:ext uri="{FF2B5EF4-FFF2-40B4-BE49-F238E27FC236}">
+                <a16:creationId xmlns:a16="http://schemas.microsoft.com/office/drawing/2014/main" id="{4650769C-42F2-B2AE-F41A-199497642C5F}"/>
+              </a:ext>
+            </a:extLst>
+          </p:cNvPr>
+          <p:cNvSpPr>
+            <a:spLocks noGrp="1"/>
+          </p:cNvSpPr>
+          <p:nvPr>
+            <p:ph type="title"/>
+          </p:nvPr>
+        </p:nvSpPr>
+        <p:spPr/>
+        <p:txBody>
+          <a:bodyPr/>
+          <a:lstStyle/>
+          <a:p>
+            <a:r>
+              <a:rPr lang="en-US" dirty="0"/>
+              <a:t>Introduction to Machine Learning</a:t>
+            </a:r>
+          </a:p>
+        </p:txBody>
+      </p:sp>
+      <p:sp>
+        <p:nvSpPr>
+          <p:cNvPr id="3" name="Content Placeholder 2">
+            <a:extLst>
+              <a:ext uri="{FF2B5EF4-FFF2-40B4-BE49-F238E27FC236}">
+                <a16:creationId xmlns:a16="http://schemas.microsoft.com/office/drawing/2014/main" id="{1C2D6A5F-5AA9-A6AD-E550-BB82A72B5E2A}"/>
+              </a:ext>
+            </a:extLst>
+          </p:cNvPr>
+          <p:cNvSpPr>
+            <a:spLocks noGrp="1"/>
+          </p:cNvSpPr>
+          <p:nvPr>
+            <p:ph idx="1"/>
+          </p:nvPr>
+        </p:nvSpPr>
+        <p:spPr>
+          <a:xfrm>
+            <a:off x="838200" y="1825072"/>
+            <a:ext cx="6696367" cy="4351338"/>
+          </a:xfrm>
+        </p:spPr>
+        <p:txBody>
+          <a:bodyPr>
+            <a:normAutofit/>
+          </a:bodyPr>
+          <a:lstStyle/>
+          <a:p>
+            <a:pPr marL="0" indent="0">
+              <a:buNone/>
+            </a:pPr>
+            <a:r>
+              <a:rPr lang="en-US" b="1" dirty="0"/>
+              <a:t>Clustering</a:t>
+            </a:r>
+            <a:r>
+              <a:rPr lang="en-US" dirty="0"/>
+              <a:t> – Inferring labels from data</a:t>
+            </a:r>
+          </a:p>
+          <a:p>
+            <a:pPr marL="0" indent="0">
+              <a:buNone/>
+            </a:pPr>
+            <a:endParaRPr lang="en-US" dirty="0"/>
+          </a:p>
+          <a:p>
+            <a:pPr marL="0" indent="0">
+              <a:buNone/>
+            </a:pPr>
+            <a:r>
+              <a:rPr lang="en-US" dirty="0"/>
+              <a:t>In this example, the data can be separated into four groups. </a:t>
+            </a:r>
+          </a:p>
+          <a:p>
+            <a:pPr marL="0" indent="0">
+              <a:buNone/>
+            </a:pPr>
+            <a:r>
+              <a:rPr lang="en-US" dirty="0"/>
+              <a:t>Once the groups are identified, is possible to assign new data to a cluster. </a:t>
+            </a:r>
+          </a:p>
+          <a:p>
+            <a:pPr marL="0" indent="0">
+              <a:buNone/>
+            </a:pPr>
+            <a:endParaRPr lang="en-US" dirty="0"/>
+          </a:p>
+          <a:p>
+            <a:pPr marL="0" indent="0">
+              <a:buNone/>
+            </a:pPr>
+            <a:r>
+              <a:rPr lang="en-US" dirty="0"/>
+              <a:t>What is the cluster  of the black dot ? </a:t>
+            </a:r>
+          </a:p>
+          <a:p>
+            <a:pPr marL="0" indent="0">
+              <a:buNone/>
+            </a:pPr>
+            <a:r>
+              <a:rPr lang="en-US" dirty="0"/>
+              <a:t>What is the cluster of the orange dot ? </a:t>
+            </a:r>
+          </a:p>
+          <a:p>
+            <a:pPr marL="0" indent="0">
+              <a:buNone/>
+            </a:pPr>
+            <a:endParaRPr lang="en-US" dirty="0"/>
+          </a:p>
+        </p:txBody>
+      </p:sp>
+      <p:pic>
+        <p:nvPicPr>
+          <p:cNvPr id="5" name="Picture 4" descr="Example of clustering problem">
+            <a:extLst>
+              <a:ext uri="{FF2B5EF4-FFF2-40B4-BE49-F238E27FC236}">
+                <a16:creationId xmlns:a16="http://schemas.microsoft.com/office/drawing/2014/main" id="{EF176362-76AA-2DD8-A9E9-12AAA0DBB002}"/>
+              </a:ext>
+            </a:extLst>
+          </p:cNvPr>
+          <p:cNvPicPr>
+            <a:picLocks noChangeAspect="1"/>
+          </p:cNvPicPr>
+          <p:nvPr/>
+        </p:nvPicPr>
+        <p:blipFill>
+          <a:blip r:embed="rId3"/>
+          <a:srcRect/>
+          <a:stretch/>
+        </p:blipFill>
+        <p:spPr>
+          <a:xfrm>
+            <a:off x="8011503" y="2472000"/>
+            <a:ext cx="4227235" cy="3344009"/>
+          </a:xfrm>
+          <a:prstGeom prst="rect">
+            <a:avLst/>
+          </a:prstGeom>
+        </p:spPr>
+      </p:pic>
+      <p:sp>
+        <p:nvSpPr>
+          <p:cNvPr id="4" name="Oval 3">
+            <a:extLst>
+              <a:ext uri="{FF2B5EF4-FFF2-40B4-BE49-F238E27FC236}">
+                <a16:creationId xmlns:a16="http://schemas.microsoft.com/office/drawing/2014/main" id="{239AAA69-2A4E-EC19-B7F5-F1184893FB36}"/>
+              </a:ext>
+            </a:extLst>
+          </p:cNvPr>
+          <p:cNvSpPr/>
+          <p:nvPr/>
+        </p:nvSpPr>
+        <p:spPr>
+          <a:xfrm>
+            <a:off x="11164186" y="4304464"/>
+            <a:ext cx="91440" cy="91440"/>
+          </a:xfrm>
+          <a:prstGeom prst="ellipse">
+            <a:avLst/>
+          </a:prstGeom>
+          <a:solidFill>
+            <a:schemeClr val="tx1"/>
+          </a:solidFill>
+        </p:spPr>
+        <p:style>
+          <a:lnRef idx="2">
+            <a:schemeClr val="accent1">
+              <a:shade val="15000"/>
+            </a:schemeClr>
+          </a:lnRef>
+          <a:fillRef idx="1">
+            <a:schemeClr val="accent1"/>
+          </a:fillRef>
+          <a:effectRef idx="0">
+            <a:schemeClr val="accent1"/>
+          </a:effectRef>
+          <a:fontRef idx="minor">
+            <a:schemeClr val="lt1"/>
+          </a:fontRef>
+        </p:style>
+        <p:txBody>
+          <a:bodyPr rtlCol="0" anchor="ctr"/>
+          <a:lstStyle/>
+          <a:p>
+            <a:pPr algn="ctr"/>
+            <a:endParaRPr lang="en-US"/>
+          </a:p>
+        </p:txBody>
+      </p:sp>
+      <p:cxnSp>
+        <p:nvCxnSpPr>
+          <p:cNvPr id="6" name="Straight Arrow Connector 5">
+            <a:extLst>
+              <a:ext uri="{FF2B5EF4-FFF2-40B4-BE49-F238E27FC236}">
+                <a16:creationId xmlns:a16="http://schemas.microsoft.com/office/drawing/2014/main" id="{A46CB9BD-D6E4-A87C-25F2-B49E88D716E1}"/>
+              </a:ext>
+            </a:extLst>
+          </p:cNvPr>
+          <p:cNvCxnSpPr/>
+          <p:nvPr/>
+        </p:nvCxnSpPr>
+        <p:spPr>
+          <a:xfrm flipH="1">
+            <a:off x="11255626" y="3241208"/>
+            <a:ext cx="642206" cy="978196"/>
+          </a:xfrm>
+          <a:prstGeom prst="straightConnector1">
+            <a:avLst/>
+          </a:prstGeom>
+          <a:ln w="38100">
+            <a:solidFill>
+              <a:srgbClr val="FF0000"/>
+            </a:solidFill>
+            <a:tailEnd type="triangle"/>
+          </a:ln>
+        </p:spPr>
+        <p:style>
+          <a:lnRef idx="2">
+            <a:schemeClr val="accent1"/>
+          </a:lnRef>
+          <a:fillRef idx="0">
+            <a:schemeClr val="accent1"/>
+          </a:fillRef>
+          <a:effectRef idx="1">
+            <a:schemeClr val="accent1"/>
+          </a:effectRef>
+          <a:fontRef idx="minor">
+            <a:schemeClr val="tx1"/>
+          </a:fontRef>
+        </p:style>
+      </p:cxnSp>
+      <p:sp>
+        <p:nvSpPr>
+          <p:cNvPr id="7" name="Oval 6">
+            <a:extLst>
+              <a:ext uri="{FF2B5EF4-FFF2-40B4-BE49-F238E27FC236}">
+                <a16:creationId xmlns:a16="http://schemas.microsoft.com/office/drawing/2014/main" id="{6A64F2A0-C07D-162C-2D1F-762DFCCE0C14}"/>
+              </a:ext>
+            </a:extLst>
+          </p:cNvPr>
+          <p:cNvSpPr/>
+          <p:nvPr/>
+        </p:nvSpPr>
+        <p:spPr>
+          <a:xfrm rot="17651866">
+            <a:off x="9112430" y="4431792"/>
+            <a:ext cx="91440" cy="91440"/>
+          </a:xfrm>
+          <a:prstGeom prst="ellipse">
+            <a:avLst/>
+          </a:prstGeom>
+          <a:solidFill>
+            <a:schemeClr val="accent2"/>
+          </a:solidFill>
+        </p:spPr>
+        <p:style>
+          <a:lnRef idx="2">
+            <a:schemeClr val="accent1">
+              <a:shade val="15000"/>
+            </a:schemeClr>
+          </a:lnRef>
+          <a:fillRef idx="1">
+            <a:schemeClr val="accent1"/>
+          </a:fillRef>
+          <a:effectRef idx="0">
+            <a:schemeClr val="accent1"/>
+          </a:effectRef>
+          <a:fontRef idx="minor">
+            <a:schemeClr val="lt1"/>
+          </a:fontRef>
+        </p:style>
+        <p:txBody>
+          <a:bodyPr rtlCol="0" anchor="ctr"/>
+          <a:lstStyle/>
+          <a:p>
+            <a:pPr algn="ctr"/>
+            <a:endParaRPr lang="en-US"/>
+          </a:p>
+        </p:txBody>
+      </p:sp>
+      <p:cxnSp>
+        <p:nvCxnSpPr>
+          <p:cNvPr id="8" name="Straight Arrow Connector 7">
+            <a:extLst>
+              <a:ext uri="{FF2B5EF4-FFF2-40B4-BE49-F238E27FC236}">
+                <a16:creationId xmlns:a16="http://schemas.microsoft.com/office/drawing/2014/main" id="{D8DC8793-C65F-5775-D6F0-7679D3B15E99}"/>
+              </a:ext>
+            </a:extLst>
+          </p:cNvPr>
+          <p:cNvCxnSpPr/>
+          <p:nvPr/>
+        </p:nvCxnSpPr>
+        <p:spPr>
+          <a:xfrm flipH="1">
+            <a:off x="9210397" y="3417708"/>
+            <a:ext cx="642206" cy="978196"/>
+          </a:xfrm>
+          <a:prstGeom prst="straightConnector1">
+            <a:avLst/>
+          </a:prstGeom>
+          <a:ln w="38100">
+            <a:solidFill>
+              <a:srgbClr val="FF0000"/>
+            </a:solidFill>
+            <a:tailEnd type="triangle"/>
+          </a:ln>
+        </p:spPr>
+        <p:style>
+          <a:lnRef idx="2">
+            <a:schemeClr val="accent1"/>
+          </a:lnRef>
+          <a:fillRef idx="0">
+            <a:schemeClr val="accent1"/>
+          </a:fillRef>
+          <a:effectRef idx="1">
+            <a:schemeClr val="accent1"/>
+          </a:effectRef>
+          <a:fontRef idx="minor">
+            <a:schemeClr val="tx1"/>
+          </a:fontRef>
+        </p:style>
+      </p:cxnSp>
+    </p:spTree>
+    <p:extLst>
+      <p:ext uri="{BB962C8B-B14F-4D97-AF65-F5344CB8AC3E}">
+        <p14:creationId xmlns:p14="http://schemas.microsoft.com/office/powerpoint/2010/main" val="55758477"/>
+      </p:ext>
+    </p:extLst>
+  </p:cSld>
+  <p:clrMapOvr>
+    <a:masterClrMapping/>
+  </p:clrMapOvr>
+</p:sld>
+</file>
+
+<file path=ppt/slides/slide2.xml><?xml version="1.0" encoding="utf-8"?>
+<p:sld xmlns:a="http://schemas.openxmlformats.org/drawingml/2006/main" xmlns:r="http://schemas.openxmlformats.org/officeDocument/2006/relationships" xmlns:p="http://schemas.openxmlformats.org/presentationml/2006/main">
+  <p:cSld>
+    <p:spTree>
+      <p:nvGrpSpPr>
+        <p:cNvPr id="1" name=""/>
+        <p:cNvGrpSpPr/>
+        <p:nvPr/>
+      </p:nvGrpSpPr>
+      <p:grpSpPr>
+        <a:xfrm>
+          <a:off x="0" y="0"/>
+          <a:ext cx="0" cy="0"/>
+          <a:chOff x="0" y="0"/>
+          <a:chExt cx="0" cy="0"/>
+        </a:xfrm>
+      </p:grpSpPr>
+      <p:sp>
+        <p:nvSpPr>
+          <p:cNvPr id="2" name="Title 1">
+            <a:extLst>
+              <a:ext uri="{FF2B5EF4-FFF2-40B4-BE49-F238E27FC236}">
+                <a16:creationId xmlns:a16="http://schemas.microsoft.com/office/drawing/2014/main" id="{4D187819-622A-96AE-20C3-721AE9FC1444}"/>
+              </a:ext>
+            </a:extLst>
+          </p:cNvPr>
+          <p:cNvSpPr>
+            <a:spLocks noGrp="1"/>
+          </p:cNvSpPr>
+          <p:nvPr>
+            <p:ph type="title"/>
+          </p:nvPr>
+        </p:nvSpPr>
+        <p:spPr/>
+        <p:txBody>
+          <a:bodyPr/>
+          <a:lstStyle/>
+          <a:p>
+            <a:r>
+              <a:rPr lang="en-US" dirty="0"/>
+              <a:t>Introduction to Machine Learning</a:t>
+            </a:r>
+          </a:p>
+        </p:txBody>
+      </p:sp>
+      <p:sp>
+        <p:nvSpPr>
+          <p:cNvPr id="3" name="Content Placeholder 2">
+            <a:extLst>
+              <a:ext uri="{FF2B5EF4-FFF2-40B4-BE49-F238E27FC236}">
+                <a16:creationId xmlns:a16="http://schemas.microsoft.com/office/drawing/2014/main" id="{3F5DB814-7616-612E-5E64-B3870AA97779}"/>
+              </a:ext>
+            </a:extLst>
+          </p:cNvPr>
+          <p:cNvSpPr>
+            <a:spLocks noGrp="1"/>
+          </p:cNvSpPr>
+          <p:nvPr>
+            <p:ph idx="1"/>
+          </p:nvPr>
+        </p:nvSpPr>
+        <p:spPr>
+          <a:xfrm>
+            <a:off x="838200" y="1825624"/>
+            <a:ext cx="10515600" cy="4722409"/>
+          </a:xfrm>
+        </p:spPr>
+        <p:txBody>
+          <a:bodyPr>
+            <a:normAutofit/>
+          </a:bodyPr>
+          <a:lstStyle/>
+          <a:p>
+            <a:pPr marL="0" indent="0">
+              <a:buNone/>
+            </a:pPr>
+            <a:r>
+              <a:rPr lang="en-US" dirty="0"/>
+              <a:t>Machine learning techniques allow us to build mathematical models to help us understand and explain observed measures (data). </a:t>
+            </a:r>
+          </a:p>
+          <a:p>
+            <a:pPr marL="0" indent="0">
+              <a:buNone/>
+            </a:pPr>
+            <a:r>
+              <a:rPr lang="en-US" dirty="0"/>
+              <a:t>These models have tunable parameters (often called weights and biases) which are adjusted (or learn) to minimize a “loss function” during the training process using data. This process allows us to </a:t>
+            </a:r>
+            <a:r>
+              <a:rPr lang="en-US" b="1" dirty="0"/>
+              <a:t>learn </a:t>
+            </a:r>
+            <a:r>
+              <a:rPr lang="en-US" dirty="0"/>
+              <a:t>from the data.</a:t>
+            </a:r>
+          </a:p>
+          <a:p>
+            <a:pPr marL="0" indent="0">
+              <a:buNone/>
+            </a:pPr>
+            <a:r>
+              <a:rPr lang="en-US" dirty="0"/>
+              <a:t>Once these models have been fit to previously seen data, they can be used to predict and understand aspects of newly observed data.</a:t>
+            </a:r>
+          </a:p>
+        </p:txBody>
+      </p:sp>
+    </p:spTree>
+    <p:extLst>
+      <p:ext uri="{BB962C8B-B14F-4D97-AF65-F5344CB8AC3E}">
+        <p14:creationId xmlns:p14="http://schemas.microsoft.com/office/powerpoint/2010/main" val="2110321354"/>
+      </p:ext>
+    </p:extLst>
+  </p:cSld>
+  <p:clrMapOvr>
+    <a:masterClrMapping/>
+  </p:clrMapOvr>
+</p:sld>
+</file>
+
+<file path=ppt/slides/slide3.xml><?xml version="1.0" encoding="utf-8"?>
+<p:sld xmlns:a="http://schemas.openxmlformats.org/drawingml/2006/main" xmlns:r="http://schemas.openxmlformats.org/officeDocument/2006/relationships" xmlns:p="http://schemas.openxmlformats.org/presentationml/2006/main">
+  <p:cSld>
+    <p:spTree>
+      <p:nvGrpSpPr>
+        <p:cNvPr id="1" name="">
+          <a:extLst>
+            <a:ext uri="{FF2B5EF4-FFF2-40B4-BE49-F238E27FC236}">
+              <a16:creationId xmlns:a16="http://schemas.microsoft.com/office/drawing/2014/main" id="{B384ED09-6755-FAF3-5E95-385D367311FD}"/>
+            </a:ext>
+          </a:extLst>
+        </p:cNvPr>
+        <p:cNvGrpSpPr/>
+        <p:nvPr/>
+      </p:nvGrpSpPr>
+      <p:grpSpPr>
+        <a:xfrm>
+          <a:off x="0" y="0"/>
+          <a:ext cx="0" cy="0"/>
+          <a:chOff x="0" y="0"/>
+          <a:chExt cx="0" cy="0"/>
+        </a:xfrm>
+      </p:grpSpPr>
+      <p:sp>
+        <p:nvSpPr>
+          <p:cNvPr id="2" name="Title 1">
+            <a:extLst>
+              <a:ext uri="{FF2B5EF4-FFF2-40B4-BE49-F238E27FC236}">
+                <a16:creationId xmlns:a16="http://schemas.microsoft.com/office/drawing/2014/main" id="{83241E42-C0F0-2F83-3C18-7B2D078BD237}"/>
+              </a:ext>
+            </a:extLst>
+          </p:cNvPr>
+          <p:cNvSpPr>
+            <a:spLocks noGrp="1"/>
+          </p:cNvSpPr>
+          <p:nvPr>
+            <p:ph type="title"/>
+          </p:nvPr>
+        </p:nvSpPr>
+        <p:spPr/>
+        <p:txBody>
+          <a:bodyPr/>
+          <a:lstStyle/>
+          <a:p>
+            <a:r>
+              <a:rPr lang="en-US" dirty="0"/>
+              <a:t>Introduction to Machine Learning</a:t>
+            </a:r>
+          </a:p>
+        </p:txBody>
+      </p:sp>
+      <p:sp>
+        <p:nvSpPr>
+          <p:cNvPr id="3" name="Content Placeholder 2">
+            <a:extLst>
+              <a:ext uri="{FF2B5EF4-FFF2-40B4-BE49-F238E27FC236}">
+                <a16:creationId xmlns:a16="http://schemas.microsoft.com/office/drawing/2014/main" id="{DD541D5B-8211-ACA4-F005-5C5D058B4994}"/>
+              </a:ext>
+            </a:extLst>
+          </p:cNvPr>
+          <p:cNvSpPr>
+            <a:spLocks noGrp="1"/>
+          </p:cNvSpPr>
+          <p:nvPr>
+            <p:ph idx="1"/>
+          </p:nvPr>
+        </p:nvSpPr>
+        <p:spPr>
+          <a:xfrm>
+            <a:off x="838200" y="1825624"/>
+            <a:ext cx="11126492" cy="4722409"/>
+          </a:xfrm>
+        </p:spPr>
+        <p:txBody>
+          <a:bodyPr>
+            <a:normAutofit/>
+          </a:bodyPr>
+          <a:lstStyle/>
+          <a:p>
+            <a:pPr marL="0" indent="0">
+              <a:buNone/>
+            </a:pPr>
+            <a:r>
+              <a:rPr lang="en-US" dirty="0"/>
+              <a:t>In my view, there are two main type of machine learning user:</a:t>
+            </a:r>
+            <a:br>
+              <a:rPr lang="en-US" dirty="0"/>
+            </a:br>
+            <a:endParaRPr lang="en-US" dirty="0"/>
+          </a:p>
+          <a:p>
+            <a:pPr>
+              <a:buFontTx/>
+              <a:buChar char="-"/>
+            </a:pPr>
+            <a:r>
+              <a:rPr lang="en-US" dirty="0"/>
+              <a:t>The Developers (The Architects) – Those who create new mathematical models to describe the observed data, and new training techniques to learn from the data </a:t>
+            </a:r>
+          </a:p>
+          <a:p>
+            <a:pPr>
+              <a:buFontTx/>
+              <a:buChar char="-"/>
+            </a:pPr>
+            <a:r>
+              <a:rPr lang="en-US" dirty="0"/>
+              <a:t>Users - Those who use existing techniques and apply them to their own data </a:t>
+            </a:r>
+          </a:p>
+          <a:p>
+            <a:pPr marL="457200" lvl="1" indent="0">
+              <a:buNone/>
+            </a:pPr>
+            <a:r>
+              <a:rPr lang="en-US" dirty="0"/>
+              <a:t>-Informed Users – Those who understand the core concepts of machine learning, can adapt the tools to fit their needs, and understand their limitations. </a:t>
+            </a:r>
+          </a:p>
+          <a:p>
+            <a:pPr marL="457200" lvl="1" indent="0">
+              <a:buNone/>
+            </a:pPr>
+            <a:r>
+              <a:rPr lang="en-US" dirty="0"/>
+              <a:t>-The Black-Box Operators – Those who use the tools without any understanding and just hope for the best results. </a:t>
+            </a:r>
+          </a:p>
+        </p:txBody>
+      </p:sp>
+    </p:spTree>
+    <p:extLst>
+      <p:ext uri="{BB962C8B-B14F-4D97-AF65-F5344CB8AC3E}">
+        <p14:creationId xmlns:p14="http://schemas.microsoft.com/office/powerpoint/2010/main" val="1537490386"/>
+      </p:ext>
+    </p:extLst>
+  </p:cSld>
+  <p:clrMapOvr>
+    <a:masterClrMapping/>
+  </p:clrMapOvr>
+</p:sld>
+</file>
+
+<file path=ppt/slides/slide4.xml><?xml version="1.0" encoding="utf-8"?>
+<p:sld xmlns:a="http://schemas.openxmlformats.org/drawingml/2006/main" xmlns:r="http://schemas.openxmlformats.org/officeDocument/2006/relationships" xmlns:p="http://schemas.openxmlformats.org/presentationml/2006/main">
+  <p:cSld>
+    <p:spTree>
+      <p:nvGrpSpPr>
+        <p:cNvPr id="1" name=""/>
+        <p:cNvGrpSpPr/>
+        <p:nvPr/>
+      </p:nvGrpSpPr>
+      <p:grpSpPr>
+        <a:xfrm>
+          <a:off x="0" y="0"/>
+          <a:ext cx="0" cy="0"/>
+          <a:chOff x="0" y="0"/>
+          <a:chExt cx="0" cy="0"/>
+        </a:xfrm>
+      </p:grpSpPr>
+      <p:sp>
+        <p:nvSpPr>
+          <p:cNvPr id="2" name="Title 1">
+            <a:extLst>
+              <a:ext uri="{FF2B5EF4-FFF2-40B4-BE49-F238E27FC236}">
+                <a16:creationId xmlns:a16="http://schemas.microsoft.com/office/drawing/2014/main" id="{AC41357A-77B8-681E-9BAC-07E7B660D69B}"/>
+              </a:ext>
+            </a:extLst>
+          </p:cNvPr>
+          <p:cNvSpPr>
+            <a:spLocks noGrp="1"/>
+          </p:cNvSpPr>
+          <p:nvPr>
+            <p:ph type="title"/>
+          </p:nvPr>
+        </p:nvSpPr>
+        <p:spPr/>
+        <p:txBody>
+          <a:bodyPr/>
+          <a:lstStyle/>
+          <a:p>
+            <a:r>
+              <a:rPr lang="en-US" dirty="0"/>
+              <a:t>Introduction to Machine Learning</a:t>
+            </a:r>
+          </a:p>
+        </p:txBody>
+      </p:sp>
+      <p:sp>
+        <p:nvSpPr>
+          <p:cNvPr id="3" name="Content Placeholder 2">
+            <a:extLst>
+              <a:ext uri="{FF2B5EF4-FFF2-40B4-BE49-F238E27FC236}">
+                <a16:creationId xmlns:a16="http://schemas.microsoft.com/office/drawing/2014/main" id="{67DE559D-2B99-3545-0DC2-B66B4EDDA99B}"/>
+              </a:ext>
+            </a:extLst>
+          </p:cNvPr>
+          <p:cNvSpPr>
+            <a:spLocks noGrp="1"/>
+          </p:cNvSpPr>
+          <p:nvPr>
+            <p:ph idx="1"/>
+          </p:nvPr>
+        </p:nvSpPr>
+        <p:spPr/>
+        <p:txBody>
+          <a:bodyPr>
+            <a:normAutofit fontScale="92500" lnSpcReduction="10000"/>
+          </a:bodyPr>
+          <a:lstStyle/>
+          <a:p>
+            <a:pPr marL="0" indent="0">
+              <a:buNone/>
+            </a:pPr>
+            <a:r>
+              <a:rPr lang="en-US" dirty="0"/>
+              <a:t>Machine learning can be categorized in different ways. At the most fundamental level, it can be classified based of the type of data under analysis</a:t>
+            </a:r>
+          </a:p>
+          <a:p>
+            <a:pPr marL="0" indent="0">
+              <a:buNone/>
+            </a:pPr>
+            <a:endParaRPr lang="en-US" dirty="0"/>
+          </a:p>
+          <a:p>
+            <a:pPr marL="0" indent="0">
+              <a:buNone/>
+            </a:pPr>
+            <a:r>
+              <a:rPr lang="en-US" dirty="0"/>
+              <a:t>- </a:t>
+            </a:r>
+            <a:r>
+              <a:rPr lang="en-US" i="1" u="sng" dirty="0"/>
+              <a:t>Supervised Learning </a:t>
+            </a:r>
+            <a:r>
+              <a:rPr lang="en-US" dirty="0"/>
+              <a:t>involves modeling the relationship between measured features of data and some label associated with the data. Supervised Learning is further subdivided into classification tasks and regression tasks: in classification, the labels are discrete categories, while in regression, the labels are typically continuous numbers.</a:t>
+            </a:r>
+          </a:p>
+          <a:p>
+            <a:pPr marL="0" indent="0">
+              <a:buNone/>
+            </a:pPr>
+            <a:r>
+              <a:rPr lang="en-US" dirty="0"/>
+              <a:t>- </a:t>
+            </a:r>
+            <a:r>
+              <a:rPr lang="en-US" i="1" u="sng" dirty="0"/>
+              <a:t>Unsupervised Learning</a:t>
+            </a:r>
+            <a:r>
+              <a:rPr lang="en-US" dirty="0"/>
+              <a:t> involves modeling the features of a dataset without reference to any label. Unsupervised Learning is further subdivided into tasks such as clustering and dimensionality reduction.</a:t>
+            </a:r>
+          </a:p>
+        </p:txBody>
+      </p:sp>
+    </p:spTree>
+    <p:extLst>
+      <p:ext uri="{BB962C8B-B14F-4D97-AF65-F5344CB8AC3E}">
+        <p14:creationId xmlns:p14="http://schemas.microsoft.com/office/powerpoint/2010/main" val="3215168058"/>
+      </p:ext>
+    </p:extLst>
+  </p:cSld>
+  <p:clrMapOvr>
+    <a:masterClrMapping/>
+  </p:clrMapOvr>
+</p:sld>
+</file>
+
+<file path=ppt/slides/slide5.xml><?xml version="1.0" encoding="utf-8"?>
+<p:sld xmlns:a="http://schemas.openxmlformats.org/drawingml/2006/main" xmlns:r="http://schemas.openxmlformats.org/officeDocument/2006/relationships" xmlns:p="http://schemas.openxmlformats.org/presentationml/2006/main">
+  <p:cSld>
+    <p:spTree>
+      <p:nvGrpSpPr>
+        <p:cNvPr id="1" name="">
+          <a:extLst>
+            <a:ext uri="{FF2B5EF4-FFF2-40B4-BE49-F238E27FC236}">
+              <a16:creationId xmlns:a16="http://schemas.microsoft.com/office/drawing/2014/main" id="{5B13372F-F4C4-21F1-67A7-97D3BB2F74C9}"/>
+            </a:ext>
+          </a:extLst>
+        </p:cNvPr>
+        <p:cNvGrpSpPr/>
+        <p:nvPr/>
+      </p:nvGrpSpPr>
+      <p:grpSpPr>
+        <a:xfrm>
+          <a:off x="0" y="0"/>
+          <a:ext cx="0" cy="0"/>
+          <a:chOff x="0" y="0"/>
+          <a:chExt cx="0" cy="0"/>
+        </a:xfrm>
+      </p:grpSpPr>
+      <p:sp>
+        <p:nvSpPr>
+          <p:cNvPr id="2" name="Title 1">
+            <a:extLst>
+              <a:ext uri="{FF2B5EF4-FFF2-40B4-BE49-F238E27FC236}">
+                <a16:creationId xmlns:a16="http://schemas.microsoft.com/office/drawing/2014/main" id="{DDB61746-106E-33E6-71C3-C9EB7D71463B}"/>
+              </a:ext>
+            </a:extLst>
+          </p:cNvPr>
+          <p:cNvSpPr>
+            <a:spLocks noGrp="1"/>
+          </p:cNvSpPr>
+          <p:nvPr>
+            <p:ph type="title"/>
+          </p:nvPr>
+        </p:nvSpPr>
+        <p:spPr/>
+        <p:txBody>
+          <a:bodyPr/>
+          <a:lstStyle/>
+          <a:p>
+            <a:r>
+              <a:rPr lang="en-US" dirty="0"/>
+              <a:t>Introduction to Machine Learning</a:t>
+            </a:r>
+          </a:p>
+        </p:txBody>
+      </p:sp>
+      <p:sp>
+        <p:nvSpPr>
+          <p:cNvPr id="3" name="Content Placeholder 2">
+            <a:extLst>
+              <a:ext uri="{FF2B5EF4-FFF2-40B4-BE49-F238E27FC236}">
+                <a16:creationId xmlns:a16="http://schemas.microsoft.com/office/drawing/2014/main" id="{33EE0B07-1F8D-3D93-B0C2-7641A3913946}"/>
+              </a:ext>
+            </a:extLst>
+          </p:cNvPr>
+          <p:cNvSpPr>
+            <a:spLocks noGrp="1"/>
+          </p:cNvSpPr>
+          <p:nvPr>
+            <p:ph idx="1"/>
+          </p:nvPr>
+        </p:nvSpPr>
+        <p:spPr>
+          <a:xfrm>
+            <a:off x="838200" y="1825625"/>
+            <a:ext cx="6687065" cy="4351338"/>
+          </a:xfrm>
+        </p:spPr>
+        <p:txBody>
+          <a:bodyPr>
+            <a:normAutofit fontScale="92500" lnSpcReduction="10000"/>
+          </a:bodyPr>
+          <a:lstStyle/>
+          <a:p>
+            <a:pPr marL="0" indent="0">
+              <a:buNone/>
+            </a:pPr>
+            <a:r>
+              <a:rPr lang="en-US" b="1" dirty="0"/>
+              <a:t>Regression</a:t>
+            </a:r>
+            <a:r>
+              <a:rPr lang="en-US" dirty="0"/>
+              <a:t> – Predicting continuous labels</a:t>
+            </a:r>
+          </a:p>
+          <a:p>
+            <a:pPr marL="0" indent="0">
+              <a:buNone/>
+            </a:pPr>
+            <a:endParaRPr lang="en-US" dirty="0"/>
+          </a:p>
+          <a:p>
+            <a:pPr marL="0" indent="0">
+              <a:buNone/>
+            </a:pPr>
+            <a:r>
+              <a:rPr lang="en-US" dirty="0"/>
+              <a:t>In a regression problem, there are typically one or multiple features (called independent variable(s)) and each feature set is associated with an output (or dependent variable). </a:t>
+            </a:r>
+          </a:p>
+          <a:p>
+            <a:pPr marL="0" indent="0">
+              <a:buNone/>
+            </a:pPr>
+            <a:endParaRPr lang="en-US" dirty="0"/>
+          </a:p>
+          <a:p>
+            <a:pPr marL="0" indent="0">
+              <a:buNone/>
+            </a:pPr>
+            <a:r>
+              <a:rPr lang="en-US" dirty="0"/>
+              <a:t>In this example, we have one independent variable (plotted in the x-axis) and one dependent variable (plotted in the x-axis) </a:t>
+            </a:r>
+          </a:p>
+          <a:p>
+            <a:pPr marL="0" indent="0">
+              <a:buNone/>
+            </a:pPr>
+            <a:endParaRPr lang="en-US" dirty="0"/>
+          </a:p>
+        </p:txBody>
+      </p:sp>
+      <p:pic>
+        <p:nvPicPr>
+          <p:cNvPr id="5" name="Picture 4" descr="Example of regression problem">
+            <a:extLst>
+              <a:ext uri="{FF2B5EF4-FFF2-40B4-BE49-F238E27FC236}">
+                <a16:creationId xmlns:a16="http://schemas.microsoft.com/office/drawing/2014/main" id="{499CF652-9ABB-42C1-8011-99EADA4E876F}"/>
+              </a:ext>
+            </a:extLst>
+          </p:cNvPr>
+          <p:cNvPicPr>
+            <a:picLocks noChangeAspect="1"/>
+          </p:cNvPicPr>
+          <p:nvPr/>
+        </p:nvPicPr>
+        <p:blipFill>
+          <a:blip r:embed="rId3"/>
+          <a:stretch>
+            <a:fillRect/>
+          </a:stretch>
+        </p:blipFill>
+        <p:spPr>
+          <a:xfrm>
+            <a:off x="7525265" y="2298073"/>
+            <a:ext cx="4836926" cy="3406442"/>
+          </a:xfrm>
+          <a:prstGeom prst="rect">
+            <a:avLst/>
+          </a:prstGeom>
+        </p:spPr>
+      </p:pic>
+      <p:sp>
+        <p:nvSpPr>
+          <p:cNvPr id="6" name="TextBox 5">
+            <a:extLst>
+              <a:ext uri="{FF2B5EF4-FFF2-40B4-BE49-F238E27FC236}">
+                <a16:creationId xmlns:a16="http://schemas.microsoft.com/office/drawing/2014/main" id="{B26D8388-5D5C-42C6-8C5A-82DD400320C0}"/>
+              </a:ext>
+            </a:extLst>
+          </p:cNvPr>
+          <p:cNvSpPr txBox="1"/>
+          <p:nvPr/>
+        </p:nvSpPr>
+        <p:spPr>
+          <a:xfrm>
+            <a:off x="8773760" y="5807078"/>
+            <a:ext cx="2577180" cy="369332"/>
+          </a:xfrm>
+          <a:prstGeom prst="rect">
+            <a:avLst/>
+          </a:prstGeom>
+          <a:noFill/>
+        </p:spPr>
+        <p:txBody>
+          <a:bodyPr wrap="none" rtlCol="0">
+            <a:spAutoFit/>
+          </a:bodyPr>
+          <a:lstStyle/>
+          <a:p>
+            <a:r>
+              <a:rPr lang="en-US" dirty="0"/>
+              <a:t>Independent variable (x)</a:t>
+            </a:r>
+          </a:p>
+        </p:txBody>
+      </p:sp>
+      <p:sp>
+        <p:nvSpPr>
+          <p:cNvPr id="7" name="TextBox 6">
+            <a:extLst>
+              <a:ext uri="{FF2B5EF4-FFF2-40B4-BE49-F238E27FC236}">
+                <a16:creationId xmlns:a16="http://schemas.microsoft.com/office/drawing/2014/main" id="{E8553B01-5E92-D315-D700-306F97791041}"/>
+              </a:ext>
+            </a:extLst>
+          </p:cNvPr>
+          <p:cNvSpPr txBox="1"/>
+          <p:nvPr/>
+        </p:nvSpPr>
+        <p:spPr>
+          <a:xfrm rot="16200000">
+            <a:off x="6205880" y="3816628"/>
+            <a:ext cx="2421689" cy="369332"/>
+          </a:xfrm>
+          <a:prstGeom prst="rect">
+            <a:avLst/>
+          </a:prstGeom>
+          <a:noFill/>
+        </p:spPr>
+        <p:txBody>
+          <a:bodyPr wrap="none" rtlCol="0">
+            <a:spAutoFit/>
+          </a:bodyPr>
+          <a:lstStyle/>
+          <a:p>
+            <a:r>
+              <a:rPr lang="en-US" dirty="0"/>
+              <a:t>Dependent variable (y)</a:t>
+            </a:r>
+          </a:p>
+        </p:txBody>
+      </p:sp>
+    </p:spTree>
+    <p:extLst>
+      <p:ext uri="{BB962C8B-B14F-4D97-AF65-F5344CB8AC3E}">
+        <p14:creationId xmlns:p14="http://schemas.microsoft.com/office/powerpoint/2010/main" val="2630271377"/>
+      </p:ext>
+    </p:extLst>
+  </p:cSld>
+  <p:clrMapOvr>
+    <a:masterClrMapping/>
+  </p:clrMapOvr>
+</p:sld>
+</file>
+
+<file path=ppt/slides/slide6.xml><?xml version="1.0" encoding="utf-8"?>
+<p:sld xmlns:a="http://schemas.openxmlformats.org/drawingml/2006/main" xmlns:r="http://schemas.openxmlformats.org/officeDocument/2006/relationships" xmlns:p="http://schemas.openxmlformats.org/presentationml/2006/main">
+  <p:cSld>
+    <p:spTree>
+      <p:nvGrpSpPr>
+        <p:cNvPr id="1" name="">
+          <a:extLst>
+            <a:ext uri="{FF2B5EF4-FFF2-40B4-BE49-F238E27FC236}">
               <a16:creationId xmlns:a16="http://schemas.microsoft.com/office/drawing/2014/main" id="{2CF476DB-7444-D4C6-82BD-1C7BFF197C19}"/>
             </a:ext>
           </a:extLst>
@@ -5500,7 +7557,7 @@
 </p:sld>
 </file>
 
-<file path=ppt/slides/slide11.xml><?xml version="1.0" encoding="utf-8"?>
+<file path=ppt/slides/slide7.xml><?xml version="1.0" encoding="utf-8"?>
 <p:sld xmlns:a="http://schemas.openxmlformats.org/drawingml/2006/main" xmlns:r="http://schemas.openxmlformats.org/officeDocument/2006/relationships" xmlns:p="http://schemas.openxmlformats.org/presentationml/2006/main">
   <p:cSld>
     <p:spTree>
@@ -5551,8 +7608,8 @@
           </a:p>
         </p:txBody>
       </p:sp>
-      <mc:AlternateContent xmlns:mc="http://schemas.openxmlformats.org/markup-compatibility/2006" xmlns:a14="http://schemas.microsoft.com/office/drawing/2010/main">
-        <mc:Choice Requires="a14">
+      <mc:AlternateContent xmlns:mc="http://schemas.openxmlformats.org/markup-compatibility/2006">
+        <mc:Choice xmlns:a14="http://schemas.microsoft.com/office/drawing/2010/main" Requires="a14">
           <p:sp>
             <p:nvSpPr>
               <p:cNvPr id="3" name="Content Placeholder 2">
@@ -5605,7 +7662,15 @@
                 </a:pPr>
                 <a:r>
                   <a:rPr lang="en-US" dirty="0"/>
-                  <a:t>The objective of the regression problem is to identify the weights (</a:t>
+                  <a:t>The objective of the regression problem is to</a:t>
+                </a:r>
+                <a:r>
+                  <a:rPr lang="en-US" b="1" dirty="0"/>
+                  <a:t> learn </a:t>
+                </a:r>
+                <a:r>
+                  <a:rPr lang="en-US" dirty="0"/>
+                  <a:t>the weights (</a:t>
                 </a:r>
                 <a14:m>
                   <m:oMath xmlns:m="http://schemas.openxmlformats.org/officeDocument/2006/math">
@@ -5690,7 +7755,7 @@
             </p:txBody>
           </p:sp>
         </mc:Choice>
-        <mc:Fallback xmlns="">
+        <mc:Fallback>
           <p:sp>
             <p:nvSpPr>
               <p:cNvPr id="3" name="Content Placeholder 2">
@@ -5846,7 +7911,7 @@
 </p:sld>
 </file>
 
-<file path=ppt/slides/slide12.xml><?xml version="1.0" encoding="utf-8"?>
+<file path=ppt/slides/slide8.xml><?xml version="1.0" encoding="utf-8"?>
 <p:sld xmlns:a="http://schemas.openxmlformats.org/drawingml/2006/main" xmlns:r="http://schemas.openxmlformats.org/officeDocument/2006/relationships" xmlns:p="http://schemas.openxmlformats.org/presentationml/2006/main">
   <p:cSld>
     <p:spTree>
@@ -6366,543 +8431,7 @@
 </p:sld>
 </file>
 
-<file path=ppt/slides/slide13.xml><?xml version="1.0" encoding="utf-8"?>
-<p:sld xmlns:a="http://schemas.openxmlformats.org/drawingml/2006/main" xmlns:r="http://schemas.openxmlformats.org/officeDocument/2006/relationships" xmlns:p="http://schemas.openxmlformats.org/presentationml/2006/main">
-  <p:cSld>
-    <p:spTree>
-      <p:nvGrpSpPr>
-        <p:cNvPr id="1" name="">
-          <a:extLst>
-            <a:ext uri="{FF2B5EF4-FFF2-40B4-BE49-F238E27FC236}">
-              <a16:creationId xmlns:a16="http://schemas.microsoft.com/office/drawing/2014/main" id="{80675CD3-538D-B366-F33C-6005B0A72D1C}"/>
-            </a:ext>
-          </a:extLst>
-        </p:cNvPr>
-        <p:cNvGrpSpPr/>
-        <p:nvPr/>
-      </p:nvGrpSpPr>
-      <p:grpSpPr>
-        <a:xfrm>
-          <a:off x="0" y="0"/>
-          <a:ext cx="0" cy="0"/>
-          <a:chOff x="0" y="0"/>
-          <a:chExt cx="0" cy="0"/>
-        </a:xfrm>
-      </p:grpSpPr>
-      <p:sp>
-        <p:nvSpPr>
-          <p:cNvPr id="2" name="Title 1">
-            <a:extLst>
-              <a:ext uri="{FF2B5EF4-FFF2-40B4-BE49-F238E27FC236}">
-                <a16:creationId xmlns:a16="http://schemas.microsoft.com/office/drawing/2014/main" id="{6A1BB93D-9D2F-173F-3D72-83378C554C97}"/>
-              </a:ext>
-            </a:extLst>
-          </p:cNvPr>
-          <p:cNvSpPr>
-            <a:spLocks noGrp="1"/>
-          </p:cNvSpPr>
-          <p:nvPr>
-            <p:ph type="title"/>
-          </p:nvPr>
-        </p:nvSpPr>
-        <p:spPr/>
-        <p:txBody>
-          <a:bodyPr/>
-          <a:lstStyle/>
-          <a:p>
-            <a:r>
-              <a:rPr lang="en-US" dirty="0"/>
-              <a:t>Introduction to Machine Learning</a:t>
-            </a:r>
-          </a:p>
-        </p:txBody>
-      </p:sp>
-      <p:sp>
-        <p:nvSpPr>
-          <p:cNvPr id="3" name="Content Placeholder 2">
-            <a:extLst>
-              <a:ext uri="{FF2B5EF4-FFF2-40B4-BE49-F238E27FC236}">
-                <a16:creationId xmlns:a16="http://schemas.microsoft.com/office/drawing/2014/main" id="{802F5377-EDEA-66CB-0055-1EEB73FBA0C7}"/>
-              </a:ext>
-            </a:extLst>
-          </p:cNvPr>
-          <p:cNvSpPr>
-            <a:spLocks noGrp="1"/>
-          </p:cNvSpPr>
-          <p:nvPr>
-            <p:ph idx="1"/>
-          </p:nvPr>
-        </p:nvSpPr>
-        <p:spPr>
-          <a:xfrm>
-            <a:off x="838200" y="1825072"/>
-            <a:ext cx="6696367" cy="4351338"/>
-          </a:xfrm>
-        </p:spPr>
-        <p:txBody>
-          <a:bodyPr>
-            <a:normAutofit fontScale="92500"/>
-          </a:bodyPr>
-          <a:lstStyle/>
-          <a:p>
-            <a:pPr marL="0" indent="0">
-              <a:buNone/>
-            </a:pPr>
-            <a:r>
-              <a:rPr lang="en-US" b="1" dirty="0"/>
-              <a:t>Clustering</a:t>
-            </a:r>
-            <a:r>
-              <a:rPr lang="en-US" dirty="0"/>
-              <a:t> – Inferring labels from data</a:t>
-            </a:r>
-          </a:p>
-          <a:p>
-            <a:pPr marL="0" indent="0">
-              <a:buNone/>
-            </a:pPr>
-            <a:endParaRPr lang="en-US" dirty="0"/>
-          </a:p>
-          <a:p>
-            <a:pPr marL="0" indent="0">
-              <a:buNone/>
-            </a:pPr>
-            <a:r>
-              <a:rPr lang="en-US" dirty="0"/>
-              <a:t>Clustering is a common unsupervised learning problem.  In a clustering problem, the features can typically be separated into different groups.</a:t>
-            </a:r>
-          </a:p>
-          <a:p>
-            <a:pPr marL="0" indent="0">
-              <a:buNone/>
-            </a:pPr>
-            <a:endParaRPr lang="en-US" dirty="0"/>
-          </a:p>
-          <a:p>
-            <a:pPr marL="0" indent="0">
-              <a:buNone/>
-            </a:pPr>
-            <a:r>
-              <a:rPr lang="en-US" dirty="0"/>
-              <a:t>A clustering algorithm will use the structure of the data to determine how many groups are present and the class for each measurement. </a:t>
-            </a:r>
-          </a:p>
-        </p:txBody>
-      </p:sp>
-      <p:pic>
-        <p:nvPicPr>
-          <p:cNvPr id="5" name="Picture 4" descr="Example of clustering problem">
-            <a:extLst>
-              <a:ext uri="{FF2B5EF4-FFF2-40B4-BE49-F238E27FC236}">
-                <a16:creationId xmlns:a16="http://schemas.microsoft.com/office/drawing/2014/main" id="{DB58B566-2249-D766-6E39-8E2EECF701E3}"/>
-              </a:ext>
-            </a:extLst>
-          </p:cNvPr>
-          <p:cNvPicPr>
-            <a:picLocks noChangeAspect="1"/>
-          </p:cNvPicPr>
-          <p:nvPr/>
-        </p:nvPicPr>
-        <p:blipFill>
-          <a:blip r:embed="rId3"/>
-          <a:srcRect/>
-          <a:stretch/>
-        </p:blipFill>
-        <p:spPr>
-          <a:xfrm>
-            <a:off x="7999909" y="2472000"/>
-            <a:ext cx="4250424" cy="3344009"/>
-          </a:xfrm>
-          <a:prstGeom prst="rect">
-            <a:avLst/>
-          </a:prstGeom>
-        </p:spPr>
-      </p:pic>
-    </p:spTree>
-    <p:extLst>
-      <p:ext uri="{BB962C8B-B14F-4D97-AF65-F5344CB8AC3E}">
-        <p14:creationId xmlns:p14="http://schemas.microsoft.com/office/powerpoint/2010/main" val="2660915328"/>
-      </p:ext>
-    </p:extLst>
-  </p:cSld>
-  <p:clrMapOvr>
-    <a:masterClrMapping/>
-  </p:clrMapOvr>
-</p:sld>
-</file>
-
-<file path=ppt/slides/slide14.xml><?xml version="1.0" encoding="utf-8"?>
-<p:sld xmlns:a="http://schemas.openxmlformats.org/drawingml/2006/main" xmlns:r="http://schemas.openxmlformats.org/officeDocument/2006/relationships" xmlns:p="http://schemas.openxmlformats.org/presentationml/2006/main">
-  <p:cSld>
-    <p:spTree>
-      <p:nvGrpSpPr>
-        <p:cNvPr id="1" name="">
-          <a:extLst>
-            <a:ext uri="{FF2B5EF4-FFF2-40B4-BE49-F238E27FC236}">
-              <a16:creationId xmlns:a16="http://schemas.microsoft.com/office/drawing/2014/main" id="{8C77C37D-4090-2E60-5823-56A6D0A386C6}"/>
-            </a:ext>
-          </a:extLst>
-        </p:cNvPr>
-        <p:cNvGrpSpPr/>
-        <p:nvPr/>
-      </p:nvGrpSpPr>
-      <p:grpSpPr>
-        <a:xfrm>
-          <a:off x="0" y="0"/>
-          <a:ext cx="0" cy="0"/>
-          <a:chOff x="0" y="0"/>
-          <a:chExt cx="0" cy="0"/>
-        </a:xfrm>
-      </p:grpSpPr>
-      <p:sp>
-        <p:nvSpPr>
-          <p:cNvPr id="2" name="Title 1">
-            <a:extLst>
-              <a:ext uri="{FF2B5EF4-FFF2-40B4-BE49-F238E27FC236}">
-                <a16:creationId xmlns:a16="http://schemas.microsoft.com/office/drawing/2014/main" id="{4650769C-42F2-B2AE-F41A-199497642C5F}"/>
-              </a:ext>
-            </a:extLst>
-          </p:cNvPr>
-          <p:cNvSpPr>
-            <a:spLocks noGrp="1"/>
-          </p:cNvSpPr>
-          <p:nvPr>
-            <p:ph type="title"/>
-          </p:nvPr>
-        </p:nvSpPr>
-        <p:spPr/>
-        <p:txBody>
-          <a:bodyPr/>
-          <a:lstStyle/>
-          <a:p>
-            <a:r>
-              <a:rPr lang="en-US" dirty="0"/>
-              <a:t>Introduction to Machine Learning</a:t>
-            </a:r>
-          </a:p>
-        </p:txBody>
-      </p:sp>
-      <p:sp>
-        <p:nvSpPr>
-          <p:cNvPr id="3" name="Content Placeholder 2">
-            <a:extLst>
-              <a:ext uri="{FF2B5EF4-FFF2-40B4-BE49-F238E27FC236}">
-                <a16:creationId xmlns:a16="http://schemas.microsoft.com/office/drawing/2014/main" id="{1C2D6A5F-5AA9-A6AD-E550-BB82A72B5E2A}"/>
-              </a:ext>
-            </a:extLst>
-          </p:cNvPr>
-          <p:cNvSpPr>
-            <a:spLocks noGrp="1"/>
-          </p:cNvSpPr>
-          <p:nvPr>
-            <p:ph idx="1"/>
-          </p:nvPr>
-        </p:nvSpPr>
-        <p:spPr>
-          <a:xfrm>
-            <a:off x="838200" y="1825072"/>
-            <a:ext cx="6696367" cy="4351338"/>
-          </a:xfrm>
-        </p:spPr>
-        <p:txBody>
-          <a:bodyPr>
-            <a:normAutofit/>
-          </a:bodyPr>
-          <a:lstStyle/>
-          <a:p>
-            <a:pPr marL="0" indent="0">
-              <a:buNone/>
-            </a:pPr>
-            <a:r>
-              <a:rPr lang="en-US" b="1" dirty="0"/>
-              <a:t>Clustering</a:t>
-            </a:r>
-            <a:r>
-              <a:rPr lang="en-US" dirty="0"/>
-              <a:t> – Inferring labels from data</a:t>
-            </a:r>
-          </a:p>
-          <a:p>
-            <a:pPr marL="0" indent="0">
-              <a:buNone/>
-            </a:pPr>
-            <a:endParaRPr lang="en-US" dirty="0"/>
-          </a:p>
-          <a:p>
-            <a:pPr marL="0" indent="0">
-              <a:buNone/>
-            </a:pPr>
-            <a:r>
-              <a:rPr lang="en-US" dirty="0"/>
-              <a:t>In this example, the data can be separated into four groups. </a:t>
-            </a:r>
-          </a:p>
-          <a:p>
-            <a:pPr marL="0" indent="0">
-              <a:buNone/>
-            </a:pPr>
-            <a:r>
-              <a:rPr lang="en-US" dirty="0"/>
-              <a:t>Once the groups are identified, is possible to assign new data to a cluster. </a:t>
-            </a:r>
-          </a:p>
-          <a:p>
-            <a:pPr marL="0" indent="0">
-              <a:buNone/>
-            </a:pPr>
-            <a:endParaRPr lang="en-US" dirty="0"/>
-          </a:p>
-          <a:p>
-            <a:pPr marL="0" indent="0">
-              <a:buNone/>
-            </a:pPr>
-            <a:r>
-              <a:rPr lang="en-US" dirty="0"/>
-              <a:t>What is the cluster  of the black dot ? </a:t>
-            </a:r>
-          </a:p>
-          <a:p>
-            <a:pPr marL="0" indent="0">
-              <a:buNone/>
-            </a:pPr>
-            <a:r>
-              <a:rPr lang="en-US" dirty="0"/>
-              <a:t>What is the cluster of the orange dot ? </a:t>
-            </a:r>
-          </a:p>
-          <a:p>
-            <a:pPr marL="0" indent="0">
-              <a:buNone/>
-            </a:pPr>
-            <a:endParaRPr lang="en-US" dirty="0"/>
-          </a:p>
-        </p:txBody>
-      </p:sp>
-      <p:pic>
-        <p:nvPicPr>
-          <p:cNvPr id="5" name="Picture 4" descr="Example of clustering problem">
-            <a:extLst>
-              <a:ext uri="{FF2B5EF4-FFF2-40B4-BE49-F238E27FC236}">
-                <a16:creationId xmlns:a16="http://schemas.microsoft.com/office/drawing/2014/main" id="{EF176362-76AA-2DD8-A9E9-12AAA0DBB002}"/>
-              </a:ext>
-            </a:extLst>
-          </p:cNvPr>
-          <p:cNvPicPr>
-            <a:picLocks noChangeAspect="1"/>
-          </p:cNvPicPr>
-          <p:nvPr/>
-        </p:nvPicPr>
-        <p:blipFill>
-          <a:blip r:embed="rId3"/>
-          <a:srcRect/>
-          <a:stretch/>
-        </p:blipFill>
-        <p:spPr>
-          <a:xfrm>
-            <a:off x="8011503" y="2472000"/>
-            <a:ext cx="4227235" cy="3344009"/>
-          </a:xfrm>
-          <a:prstGeom prst="rect">
-            <a:avLst/>
-          </a:prstGeom>
-        </p:spPr>
-      </p:pic>
-      <p:sp>
-        <p:nvSpPr>
-          <p:cNvPr id="4" name="Oval 3">
-            <a:extLst>
-              <a:ext uri="{FF2B5EF4-FFF2-40B4-BE49-F238E27FC236}">
-                <a16:creationId xmlns:a16="http://schemas.microsoft.com/office/drawing/2014/main" id="{239AAA69-2A4E-EC19-B7F5-F1184893FB36}"/>
-              </a:ext>
-            </a:extLst>
-          </p:cNvPr>
-          <p:cNvSpPr/>
-          <p:nvPr/>
-        </p:nvSpPr>
-        <p:spPr>
-          <a:xfrm>
-            <a:off x="11164186" y="4304464"/>
-            <a:ext cx="91440" cy="91440"/>
-          </a:xfrm>
-          <a:prstGeom prst="ellipse">
-            <a:avLst/>
-          </a:prstGeom>
-          <a:solidFill>
-            <a:schemeClr val="tx1"/>
-          </a:solidFill>
-        </p:spPr>
-        <p:style>
-          <a:lnRef idx="2">
-            <a:schemeClr val="accent1">
-              <a:shade val="15000"/>
-            </a:schemeClr>
-          </a:lnRef>
-          <a:fillRef idx="1">
-            <a:schemeClr val="accent1"/>
-          </a:fillRef>
-          <a:effectRef idx="0">
-            <a:schemeClr val="accent1"/>
-          </a:effectRef>
-          <a:fontRef idx="minor">
-            <a:schemeClr val="lt1"/>
-          </a:fontRef>
-        </p:style>
-        <p:txBody>
-          <a:bodyPr rtlCol="0" anchor="ctr"/>
-          <a:lstStyle/>
-          <a:p>
-            <a:pPr algn="ctr"/>
-            <a:endParaRPr lang="en-US"/>
-          </a:p>
-        </p:txBody>
-      </p:sp>
-      <p:cxnSp>
-        <p:nvCxnSpPr>
-          <p:cNvPr id="6" name="Straight Arrow Connector 5">
-            <a:extLst>
-              <a:ext uri="{FF2B5EF4-FFF2-40B4-BE49-F238E27FC236}">
-                <a16:creationId xmlns:a16="http://schemas.microsoft.com/office/drawing/2014/main" id="{A46CB9BD-D6E4-A87C-25F2-B49E88D716E1}"/>
-              </a:ext>
-            </a:extLst>
-          </p:cNvPr>
-          <p:cNvCxnSpPr/>
-          <p:nvPr/>
-        </p:nvCxnSpPr>
-        <p:spPr>
-          <a:xfrm flipH="1">
-            <a:off x="11255626" y="3241208"/>
-            <a:ext cx="642206" cy="978196"/>
-          </a:xfrm>
-          <a:prstGeom prst="straightConnector1">
-            <a:avLst/>
-          </a:prstGeom>
-          <a:ln w="38100">
-            <a:solidFill>
-              <a:srgbClr val="FF0000"/>
-            </a:solidFill>
-            <a:tailEnd type="triangle"/>
-          </a:ln>
-        </p:spPr>
-        <p:style>
-          <a:lnRef idx="2">
-            <a:schemeClr val="accent1"/>
-          </a:lnRef>
-          <a:fillRef idx="0">
-            <a:schemeClr val="accent1"/>
-          </a:fillRef>
-          <a:effectRef idx="1">
-            <a:schemeClr val="accent1"/>
-          </a:effectRef>
-          <a:fontRef idx="minor">
-            <a:schemeClr val="tx1"/>
-          </a:fontRef>
-        </p:style>
-      </p:cxnSp>
-      <p:sp>
-        <p:nvSpPr>
-          <p:cNvPr id="7" name="Oval 6">
-            <a:extLst>
-              <a:ext uri="{FF2B5EF4-FFF2-40B4-BE49-F238E27FC236}">
-                <a16:creationId xmlns:a16="http://schemas.microsoft.com/office/drawing/2014/main" id="{6A64F2A0-C07D-162C-2D1F-762DFCCE0C14}"/>
-              </a:ext>
-            </a:extLst>
-          </p:cNvPr>
-          <p:cNvSpPr/>
-          <p:nvPr/>
-        </p:nvSpPr>
-        <p:spPr>
-          <a:xfrm rot="17651866">
-            <a:off x="9112430" y="4431792"/>
-            <a:ext cx="91440" cy="91440"/>
-          </a:xfrm>
-          <a:prstGeom prst="ellipse">
-            <a:avLst/>
-          </a:prstGeom>
-          <a:solidFill>
-            <a:schemeClr val="accent2"/>
-          </a:solidFill>
-        </p:spPr>
-        <p:style>
-          <a:lnRef idx="2">
-            <a:schemeClr val="accent1">
-              <a:shade val="15000"/>
-            </a:schemeClr>
-          </a:lnRef>
-          <a:fillRef idx="1">
-            <a:schemeClr val="accent1"/>
-          </a:fillRef>
-          <a:effectRef idx="0">
-            <a:schemeClr val="accent1"/>
-          </a:effectRef>
-          <a:fontRef idx="minor">
-            <a:schemeClr val="lt1"/>
-          </a:fontRef>
-        </p:style>
-        <p:txBody>
-          <a:bodyPr rtlCol="0" anchor="ctr"/>
-          <a:lstStyle/>
-          <a:p>
-            <a:pPr algn="ctr"/>
-            <a:endParaRPr lang="en-US"/>
-          </a:p>
-        </p:txBody>
-      </p:sp>
-      <p:cxnSp>
-        <p:nvCxnSpPr>
-          <p:cNvPr id="8" name="Straight Arrow Connector 7">
-            <a:extLst>
-              <a:ext uri="{FF2B5EF4-FFF2-40B4-BE49-F238E27FC236}">
-                <a16:creationId xmlns:a16="http://schemas.microsoft.com/office/drawing/2014/main" id="{D8DC8793-C65F-5775-D6F0-7679D3B15E99}"/>
-              </a:ext>
-            </a:extLst>
-          </p:cNvPr>
-          <p:cNvCxnSpPr/>
-          <p:nvPr/>
-        </p:nvCxnSpPr>
-        <p:spPr>
-          <a:xfrm flipH="1">
-            <a:off x="9210397" y="3417708"/>
-            <a:ext cx="642206" cy="978196"/>
-          </a:xfrm>
-          <a:prstGeom prst="straightConnector1">
-            <a:avLst/>
-          </a:prstGeom>
-          <a:ln w="38100">
-            <a:solidFill>
-              <a:srgbClr val="FF0000"/>
-            </a:solidFill>
-            <a:tailEnd type="triangle"/>
-          </a:ln>
-        </p:spPr>
-        <p:style>
-          <a:lnRef idx="2">
-            <a:schemeClr val="accent1"/>
-          </a:lnRef>
-          <a:fillRef idx="0">
-            <a:schemeClr val="accent1"/>
-          </a:fillRef>
-          <a:effectRef idx="1">
-            <a:schemeClr val="accent1"/>
-          </a:effectRef>
-          <a:fontRef idx="minor">
-            <a:schemeClr val="tx1"/>
-          </a:fontRef>
-        </p:style>
-      </p:cxnSp>
-    </p:spTree>
-    <p:extLst>
-      <p:ext uri="{BB962C8B-B14F-4D97-AF65-F5344CB8AC3E}">
-        <p14:creationId xmlns:p14="http://schemas.microsoft.com/office/powerpoint/2010/main" val="55758477"/>
-      </p:ext>
-    </p:extLst>
-  </p:cSld>
-  <p:clrMapOvr>
-    <a:masterClrMapping/>
-  </p:clrMapOvr>
-</p:sld>
-</file>
-
-<file path=ppt/slides/slide2.xml><?xml version="1.0" encoding="utf-8"?>
+<file path=ppt/slides/slide9.xml><?xml version="1.0" encoding="utf-8"?>
 <p:sld xmlns:a="http://schemas.openxmlformats.org/drawingml/2006/main" xmlns:r="http://schemas.openxmlformats.org/officeDocument/2006/relationships" xmlns:p="http://schemas.openxmlformats.org/presentationml/2006/main">
   <p:cSld>
     <p:spTree>
@@ -6924,260 +8453,6 @@
           <p:cNvPr id="2" name="Title 1">
             <a:extLst>
               <a:ext uri="{FF2B5EF4-FFF2-40B4-BE49-F238E27FC236}">
-                <a16:creationId xmlns:a16="http://schemas.microsoft.com/office/drawing/2014/main" id="{4D187819-622A-96AE-20C3-721AE9FC1444}"/>
-              </a:ext>
-            </a:extLst>
-          </p:cNvPr>
-          <p:cNvSpPr>
-            <a:spLocks noGrp="1"/>
-          </p:cNvSpPr>
-          <p:nvPr>
-            <p:ph type="title"/>
-          </p:nvPr>
-        </p:nvSpPr>
-        <p:spPr/>
-        <p:txBody>
-          <a:bodyPr/>
-          <a:lstStyle/>
-          <a:p>
-            <a:r>
-              <a:rPr lang="en-US" dirty="0"/>
-              <a:t>Introduction to Machine Learning</a:t>
-            </a:r>
-          </a:p>
-        </p:txBody>
-      </p:sp>
-      <p:sp>
-        <p:nvSpPr>
-          <p:cNvPr id="3" name="Content Placeholder 2">
-            <a:extLst>
-              <a:ext uri="{FF2B5EF4-FFF2-40B4-BE49-F238E27FC236}">
-                <a16:creationId xmlns:a16="http://schemas.microsoft.com/office/drawing/2014/main" id="{3F5DB814-7616-612E-5E64-B3870AA97779}"/>
-              </a:ext>
-            </a:extLst>
-          </p:cNvPr>
-          <p:cNvSpPr>
-            <a:spLocks noGrp="1"/>
-          </p:cNvSpPr>
-          <p:nvPr>
-            <p:ph idx="1"/>
-          </p:nvPr>
-        </p:nvSpPr>
-        <p:spPr/>
-        <p:txBody>
-          <a:bodyPr>
-            <a:normAutofit lnSpcReduction="10000"/>
-          </a:bodyPr>
-          <a:lstStyle/>
-          <a:p>
-            <a:pPr marL="0" indent="0">
-              <a:buNone/>
-            </a:pPr>
-            <a:r>
-              <a:rPr lang="en-US" dirty="0"/>
-              <a:t>In its core, machine learning techniques allow us to build mathematical models to help us understand data. </a:t>
-            </a:r>
-          </a:p>
-          <a:p>
-            <a:pPr marL="0" indent="0">
-              <a:buNone/>
-            </a:pPr>
-            <a:endParaRPr lang="en-US" dirty="0"/>
-          </a:p>
-          <a:p>
-            <a:pPr marL="0" indent="0">
-              <a:buNone/>
-            </a:pPr>
-            <a:r>
-              <a:rPr lang="en-US" dirty="0"/>
-              <a:t>These models have tunable (often called weights and biases) which are iteratively adjusted to minimize a loss function during the training process using data. This process allows us to </a:t>
-            </a:r>
-            <a:r>
-              <a:rPr lang="en-US" b="1" dirty="0"/>
-              <a:t>learn </a:t>
-            </a:r>
-            <a:r>
-              <a:rPr lang="en-US" dirty="0"/>
-              <a:t>from the data.</a:t>
-            </a:r>
-          </a:p>
-          <a:p>
-            <a:pPr marL="0" indent="0">
-              <a:buNone/>
-            </a:pPr>
-            <a:endParaRPr lang="en-US" dirty="0"/>
-          </a:p>
-          <a:p>
-            <a:pPr marL="0" indent="0">
-              <a:buNone/>
-            </a:pPr>
-            <a:r>
-              <a:rPr lang="en-US" dirty="0"/>
-              <a:t>Once these models have been fit to previously seen data, they can be used to predict and understand aspects of newly observed data.</a:t>
-            </a:r>
-          </a:p>
-        </p:txBody>
-      </p:sp>
-    </p:spTree>
-    <p:extLst>
-      <p:ext uri="{BB962C8B-B14F-4D97-AF65-F5344CB8AC3E}">
-        <p14:creationId xmlns:p14="http://schemas.microsoft.com/office/powerpoint/2010/main" val="2110321354"/>
-      </p:ext>
-    </p:extLst>
-  </p:cSld>
-  <p:clrMapOvr>
-    <a:masterClrMapping/>
-  </p:clrMapOvr>
-</p:sld>
-</file>
-
-<file path=ppt/slides/slide3.xml><?xml version="1.0" encoding="utf-8"?>
-<p:sld xmlns:a="http://schemas.openxmlformats.org/drawingml/2006/main" xmlns:r="http://schemas.openxmlformats.org/officeDocument/2006/relationships" xmlns:p="http://schemas.openxmlformats.org/presentationml/2006/main">
-  <p:cSld>
-    <p:spTree>
-      <p:nvGrpSpPr>
-        <p:cNvPr id="1" name=""/>
-        <p:cNvGrpSpPr/>
-        <p:nvPr/>
-      </p:nvGrpSpPr>
-      <p:grpSpPr>
-        <a:xfrm>
-          <a:off x="0" y="0"/>
-          <a:ext cx="0" cy="0"/>
-          <a:chOff x="0" y="0"/>
-          <a:chExt cx="0" cy="0"/>
-        </a:xfrm>
-      </p:grpSpPr>
-      <p:sp>
-        <p:nvSpPr>
-          <p:cNvPr id="2" name="Title 1">
-            <a:extLst>
-              <a:ext uri="{FF2B5EF4-FFF2-40B4-BE49-F238E27FC236}">
-                <a16:creationId xmlns:a16="http://schemas.microsoft.com/office/drawing/2014/main" id="{AC41357A-77B8-681E-9BAC-07E7B660D69B}"/>
-              </a:ext>
-            </a:extLst>
-          </p:cNvPr>
-          <p:cNvSpPr>
-            <a:spLocks noGrp="1"/>
-          </p:cNvSpPr>
-          <p:nvPr>
-            <p:ph type="title"/>
-          </p:nvPr>
-        </p:nvSpPr>
-        <p:spPr/>
-        <p:txBody>
-          <a:bodyPr/>
-          <a:lstStyle/>
-          <a:p>
-            <a:r>
-              <a:rPr lang="en-US" dirty="0"/>
-              <a:t>Introduction to Machine Learning</a:t>
-            </a:r>
-          </a:p>
-        </p:txBody>
-      </p:sp>
-      <p:sp>
-        <p:nvSpPr>
-          <p:cNvPr id="3" name="Content Placeholder 2">
-            <a:extLst>
-              <a:ext uri="{FF2B5EF4-FFF2-40B4-BE49-F238E27FC236}">
-                <a16:creationId xmlns:a16="http://schemas.microsoft.com/office/drawing/2014/main" id="{67DE559D-2B99-3545-0DC2-B66B4EDDA99B}"/>
-              </a:ext>
-            </a:extLst>
-          </p:cNvPr>
-          <p:cNvSpPr>
-            <a:spLocks noGrp="1"/>
-          </p:cNvSpPr>
-          <p:nvPr>
-            <p:ph idx="1"/>
-          </p:nvPr>
-        </p:nvSpPr>
-        <p:spPr/>
-        <p:txBody>
-          <a:bodyPr>
-            <a:normAutofit fontScale="92500"/>
-          </a:bodyPr>
-          <a:lstStyle/>
-          <a:p>
-            <a:pPr marL="0" indent="0">
-              <a:buNone/>
-            </a:pPr>
-            <a:r>
-              <a:rPr lang="en-US" dirty="0"/>
-              <a:t>Machine learning can be categorized in different ways. At the most fundamental level, it can be classified based of the type of data under analysis</a:t>
-            </a:r>
-          </a:p>
-          <a:p>
-            <a:pPr marL="0" indent="0">
-              <a:buNone/>
-            </a:pPr>
-            <a:r>
-              <a:rPr lang="en-US" dirty="0"/>
-              <a:t>- </a:t>
-            </a:r>
-            <a:r>
-              <a:rPr lang="en-US" i="1" u="sng" dirty="0"/>
-              <a:t>Supervised Learning </a:t>
-            </a:r>
-            <a:r>
-              <a:rPr lang="en-US" dirty="0"/>
-              <a:t>involves modeling the relationship between measured features of data and some label associated with the data. Supervised Learning is further subdivided into classification tasks and regression tasks: in classification, the labels are discrete categories, while in regression, the labels are continuous quantities.</a:t>
-            </a:r>
-          </a:p>
-          <a:p>
-            <a:pPr marL="0" indent="0">
-              <a:buNone/>
-            </a:pPr>
-            <a:r>
-              <a:rPr lang="en-US" dirty="0"/>
-              <a:t>- </a:t>
-            </a:r>
-            <a:r>
-              <a:rPr lang="en-US" i="1" u="sng" dirty="0"/>
-              <a:t>Unsupervised Learning</a:t>
-            </a:r>
-            <a:r>
-              <a:rPr lang="en-US" dirty="0"/>
-              <a:t> involves modeling the features of a dataset without reference to any label. Unsupervised Learning is further subdivided into tasks such as clustering and dimensionality reduction.</a:t>
-            </a:r>
-          </a:p>
-        </p:txBody>
-      </p:sp>
-    </p:spTree>
-    <p:extLst>
-      <p:ext uri="{BB962C8B-B14F-4D97-AF65-F5344CB8AC3E}">
-        <p14:creationId xmlns:p14="http://schemas.microsoft.com/office/powerpoint/2010/main" val="3215168058"/>
-      </p:ext>
-    </p:extLst>
-  </p:cSld>
-  <p:clrMapOvr>
-    <a:masterClrMapping/>
-  </p:clrMapOvr>
-</p:sld>
-</file>
-
-<file path=ppt/slides/slide4.xml><?xml version="1.0" encoding="utf-8"?>
-<p:sld xmlns:a="http://schemas.openxmlformats.org/drawingml/2006/main" xmlns:r="http://schemas.openxmlformats.org/officeDocument/2006/relationships" xmlns:p="http://schemas.openxmlformats.org/presentationml/2006/main">
-  <p:cSld>
-    <p:spTree>
-      <p:nvGrpSpPr>
-        <p:cNvPr id="1" name=""/>
-        <p:cNvGrpSpPr/>
-        <p:nvPr/>
-      </p:nvGrpSpPr>
-      <p:grpSpPr>
-        <a:xfrm>
-          <a:off x="0" y="0"/>
-          <a:ext cx="0" cy="0"/>
-          <a:chOff x="0" y="0"/>
-          <a:chExt cx="0" cy="0"/>
-        </a:xfrm>
-      </p:grpSpPr>
-      <p:sp>
-        <p:nvSpPr>
-          <p:cNvPr id="2" name="Title 1">
-            <a:extLst>
-              <a:ext uri="{FF2B5EF4-FFF2-40B4-BE49-F238E27FC236}">
                 <a16:creationId xmlns:a16="http://schemas.microsoft.com/office/drawing/2014/main" id="{4D9ABCC2-1A3C-7727-EF9E-3B8EB001C4D6}"/>
               </a:ext>
             </a:extLst>
@@ -7220,7 +8495,7 @@
         <p:spPr>
           <a:xfrm>
             <a:off x="838200" y="1825625"/>
-            <a:ext cx="6687065" cy="4351338"/>
+            <a:ext cx="6755969" cy="4351338"/>
           </a:xfrm>
         </p:spPr>
         <p:txBody>
@@ -7324,1129 +8599,6 @@
     <p:extLst>
       <p:ext uri="{BB962C8B-B14F-4D97-AF65-F5344CB8AC3E}">
         <p14:creationId xmlns:p14="http://schemas.microsoft.com/office/powerpoint/2010/main" val="486963314"/>
-      </p:ext>
-    </p:extLst>
-  </p:cSld>
-  <p:clrMapOvr>
-    <a:masterClrMapping/>
-  </p:clrMapOvr>
-</p:sld>
-</file>
-
-<file path=ppt/slides/slide5.xml><?xml version="1.0" encoding="utf-8"?>
-<p:sld xmlns:a="http://schemas.openxmlformats.org/drawingml/2006/main" xmlns:r="http://schemas.openxmlformats.org/officeDocument/2006/relationships" xmlns:p="http://schemas.openxmlformats.org/presentationml/2006/main">
-  <p:cSld>
-    <p:spTree>
-      <p:nvGrpSpPr>
-        <p:cNvPr id="1" name="">
-          <a:extLst>
-            <a:ext uri="{FF2B5EF4-FFF2-40B4-BE49-F238E27FC236}">
-              <a16:creationId xmlns:a16="http://schemas.microsoft.com/office/drawing/2014/main" id="{29A2AB72-0ECB-4F7C-DF53-96F1F7EE414B}"/>
-            </a:ext>
-          </a:extLst>
-        </p:cNvPr>
-        <p:cNvGrpSpPr/>
-        <p:nvPr/>
-      </p:nvGrpSpPr>
-      <p:grpSpPr>
-        <a:xfrm>
-          <a:off x="0" y="0"/>
-          <a:ext cx="0" cy="0"/>
-          <a:chOff x="0" y="0"/>
-          <a:chExt cx="0" cy="0"/>
-        </a:xfrm>
-      </p:grpSpPr>
-      <p:sp>
-        <p:nvSpPr>
-          <p:cNvPr id="2" name="Title 1">
-            <a:extLst>
-              <a:ext uri="{FF2B5EF4-FFF2-40B4-BE49-F238E27FC236}">
-                <a16:creationId xmlns:a16="http://schemas.microsoft.com/office/drawing/2014/main" id="{63B64FA0-FFCC-D680-6851-22A029380F7F}"/>
-              </a:ext>
-            </a:extLst>
-          </p:cNvPr>
-          <p:cNvSpPr>
-            <a:spLocks noGrp="1"/>
-          </p:cNvSpPr>
-          <p:nvPr>
-            <p:ph type="title"/>
-          </p:nvPr>
-        </p:nvSpPr>
-        <p:spPr/>
-        <p:txBody>
-          <a:bodyPr/>
-          <a:lstStyle/>
-          <a:p>
-            <a:r>
-              <a:rPr lang="en-US" dirty="0"/>
-              <a:t>Introduction to Machine Learning</a:t>
-            </a:r>
-          </a:p>
-        </p:txBody>
-      </p:sp>
-      <p:pic>
-        <p:nvPicPr>
-          <p:cNvPr id="1026" name="Picture 2" descr="Example of classification problem">
-            <a:extLst>
-              <a:ext uri="{FF2B5EF4-FFF2-40B4-BE49-F238E27FC236}">
-                <a16:creationId xmlns:a16="http://schemas.microsoft.com/office/drawing/2014/main" id="{6A9E8852-A955-28A2-85BD-D89AE1E05E2E}"/>
-              </a:ext>
-            </a:extLst>
-          </p:cNvPr>
-          <p:cNvPicPr>
-            <a:picLocks noChangeAspect="1" noChangeArrowheads="1"/>
-          </p:cNvPicPr>
-          <p:nvPr/>
-        </p:nvPicPr>
-        <p:blipFill>
-          <a:blip r:embed="rId3"/>
-          <a:srcRect/>
-          <a:stretch/>
-        </p:blipFill>
-        <p:spPr bwMode="auto">
-          <a:xfrm>
-            <a:off x="7372865" y="2150076"/>
-            <a:ext cx="5369184" cy="4026888"/>
-          </a:xfrm>
-          <a:prstGeom prst="rect">
-            <a:avLst/>
-          </a:prstGeom>
-          <a:noFill/>
-          <a:extLst>
-            <a:ext uri="{909E8E84-426E-40DD-AFC4-6F175D3DCCD1}">
-              <a14:hiddenFill xmlns:a14="http://schemas.microsoft.com/office/drawing/2010/main">
-                <a:solidFill>
-                  <a:srgbClr val="FFFFFF"/>
-                </a:solidFill>
-              </a14:hiddenFill>
-            </a:ext>
-          </a:extLst>
-        </p:spPr>
-      </p:pic>
-      <p:sp>
-        <p:nvSpPr>
-          <p:cNvPr id="3" name="Content Placeholder 2">
-            <a:extLst>
-              <a:ext uri="{FF2B5EF4-FFF2-40B4-BE49-F238E27FC236}">
-                <a16:creationId xmlns:a16="http://schemas.microsoft.com/office/drawing/2014/main" id="{CA337AE6-333C-9277-3169-A200A26FCEE3}"/>
-              </a:ext>
-            </a:extLst>
-          </p:cNvPr>
-          <p:cNvSpPr>
-            <a:spLocks noGrp="1"/>
-          </p:cNvSpPr>
-          <p:nvPr>
-            <p:ph idx="1"/>
-          </p:nvPr>
-        </p:nvSpPr>
-        <p:spPr>
-          <a:xfrm>
-            <a:off x="838200" y="1825625"/>
-            <a:ext cx="6827874" cy="4351338"/>
-          </a:xfrm>
-        </p:spPr>
-        <p:txBody>
-          <a:bodyPr>
-            <a:normAutofit/>
-          </a:bodyPr>
-          <a:lstStyle/>
-          <a:p>
-            <a:pPr marL="0" indent="0">
-              <a:buNone/>
-            </a:pPr>
-            <a:r>
-              <a:rPr lang="en-US" b="1" dirty="0"/>
-              <a:t>Classification</a:t>
-            </a:r>
-            <a:r>
-              <a:rPr lang="en-US" dirty="0"/>
-              <a:t> – Predicting discrete labels</a:t>
-            </a:r>
-          </a:p>
-          <a:p>
-            <a:pPr marL="0" indent="0">
-              <a:buNone/>
-            </a:pPr>
-            <a:endParaRPr lang="en-US" dirty="0"/>
-          </a:p>
-          <a:p>
-            <a:pPr marL="0" indent="0">
-              <a:buNone/>
-            </a:pPr>
-            <a:r>
-              <a:rPr lang="en-US" dirty="0"/>
-              <a:t>The objective of the classification problem is to define a boundary in the feature space that can separate the classes. This boundary can be a line or a more complex shape.</a:t>
-            </a:r>
-          </a:p>
-          <a:p>
-            <a:pPr marL="0" indent="0">
-              <a:buNone/>
-            </a:pPr>
-            <a:r>
-              <a:rPr lang="en-US" dirty="0"/>
-              <a:t>Classification problems usually have more than two features, so the separation in the feature space might not be intuitive. </a:t>
-            </a:r>
-          </a:p>
-        </p:txBody>
-      </p:sp>
-    </p:spTree>
-    <p:extLst>
-      <p:ext uri="{BB962C8B-B14F-4D97-AF65-F5344CB8AC3E}">
-        <p14:creationId xmlns:p14="http://schemas.microsoft.com/office/powerpoint/2010/main" val="2541717111"/>
-      </p:ext>
-    </p:extLst>
-  </p:cSld>
-  <p:clrMapOvr>
-    <a:masterClrMapping/>
-  </p:clrMapOvr>
-</p:sld>
-</file>
-
-<file path=ppt/slides/slide6.xml><?xml version="1.0" encoding="utf-8"?>
-<p:sld xmlns:a="http://schemas.openxmlformats.org/drawingml/2006/main" xmlns:r="http://schemas.openxmlformats.org/officeDocument/2006/relationships" xmlns:p="http://schemas.openxmlformats.org/presentationml/2006/main">
-  <p:cSld>
-    <p:spTree>
-      <p:nvGrpSpPr>
-        <p:cNvPr id="1" name="">
-          <a:extLst>
-            <a:ext uri="{FF2B5EF4-FFF2-40B4-BE49-F238E27FC236}">
-              <a16:creationId xmlns:a16="http://schemas.microsoft.com/office/drawing/2014/main" id="{2DA81951-8CD5-61DE-ABD8-9D3ABF19F871}"/>
-            </a:ext>
-          </a:extLst>
-        </p:cNvPr>
-        <p:cNvGrpSpPr/>
-        <p:nvPr/>
-      </p:nvGrpSpPr>
-      <p:grpSpPr>
-        <a:xfrm>
-          <a:off x="0" y="0"/>
-          <a:ext cx="0" cy="0"/>
-          <a:chOff x="0" y="0"/>
-          <a:chExt cx="0" cy="0"/>
-        </a:xfrm>
-      </p:grpSpPr>
-      <p:sp>
-        <p:nvSpPr>
-          <p:cNvPr id="2" name="Title 1">
-            <a:extLst>
-              <a:ext uri="{FF2B5EF4-FFF2-40B4-BE49-F238E27FC236}">
-                <a16:creationId xmlns:a16="http://schemas.microsoft.com/office/drawing/2014/main" id="{8930CFA4-5270-F3BA-DDC6-572A00A886DB}"/>
-              </a:ext>
-            </a:extLst>
-          </p:cNvPr>
-          <p:cNvSpPr>
-            <a:spLocks noGrp="1"/>
-          </p:cNvSpPr>
-          <p:nvPr>
-            <p:ph type="title"/>
-          </p:nvPr>
-        </p:nvSpPr>
-        <p:spPr/>
-        <p:txBody>
-          <a:bodyPr/>
-          <a:lstStyle/>
-          <a:p>
-            <a:r>
-              <a:rPr lang="en-US" dirty="0"/>
-              <a:t>Introduction to Machine Learning</a:t>
-            </a:r>
-          </a:p>
-        </p:txBody>
-      </p:sp>
-      <p:sp>
-        <p:nvSpPr>
-          <p:cNvPr id="3" name="Content Placeholder 2">
-            <a:extLst>
-              <a:ext uri="{FF2B5EF4-FFF2-40B4-BE49-F238E27FC236}">
-                <a16:creationId xmlns:a16="http://schemas.microsoft.com/office/drawing/2014/main" id="{6586ECCB-B928-FFCC-315B-11DEB13EBB57}"/>
-              </a:ext>
-            </a:extLst>
-          </p:cNvPr>
-          <p:cNvSpPr>
-            <a:spLocks noGrp="1"/>
-          </p:cNvSpPr>
-          <p:nvPr>
-            <p:ph idx="1"/>
-          </p:nvPr>
-        </p:nvSpPr>
-        <p:spPr>
-          <a:xfrm>
-            <a:off x="838200" y="1825625"/>
-            <a:ext cx="6687065" cy="4351338"/>
-          </a:xfrm>
-        </p:spPr>
-        <p:txBody>
-          <a:bodyPr>
-            <a:normAutofit/>
-          </a:bodyPr>
-          <a:lstStyle/>
-          <a:p>
-            <a:pPr marL="0" indent="0">
-              <a:buNone/>
-            </a:pPr>
-            <a:r>
-              <a:rPr lang="en-US" b="1" dirty="0"/>
-              <a:t>Classification</a:t>
-            </a:r>
-            <a:r>
-              <a:rPr lang="en-US" dirty="0"/>
-              <a:t> – Predicting discrete labels</a:t>
-            </a:r>
-          </a:p>
-          <a:p>
-            <a:pPr marL="0" indent="0">
-              <a:buNone/>
-            </a:pPr>
-            <a:endParaRPr lang="en-US" dirty="0"/>
-          </a:p>
-          <a:p>
-            <a:pPr marL="0" indent="0">
-              <a:buNone/>
-            </a:pPr>
-            <a:r>
-              <a:rPr lang="en-US" dirty="0"/>
-              <a:t>Once the boundary is defined, we can use it to classify new data that does not have a label. </a:t>
-            </a:r>
-          </a:p>
-          <a:p>
-            <a:pPr marL="0" indent="0">
-              <a:buNone/>
-            </a:pPr>
-            <a:endParaRPr lang="en-US" dirty="0"/>
-          </a:p>
-          <a:p>
-            <a:pPr marL="0" indent="0">
-              <a:buNone/>
-            </a:pPr>
-            <a:r>
-              <a:rPr lang="en-US" dirty="0"/>
-              <a:t>What is the label of the black dot ? </a:t>
-            </a:r>
-          </a:p>
-          <a:p>
-            <a:pPr marL="0" indent="0">
-              <a:buNone/>
-            </a:pPr>
-            <a:r>
-              <a:rPr lang="en-US" dirty="0"/>
-              <a:t>What is the label of the green dot ? </a:t>
-            </a:r>
-          </a:p>
-          <a:p>
-            <a:pPr marL="0" indent="0">
-              <a:buNone/>
-            </a:pPr>
-            <a:endParaRPr lang="en-US" dirty="0"/>
-          </a:p>
-        </p:txBody>
-      </p:sp>
-      <p:pic>
-        <p:nvPicPr>
-          <p:cNvPr id="1026" name="Picture 2" descr="Example of classification problem">
-            <a:extLst>
-              <a:ext uri="{FF2B5EF4-FFF2-40B4-BE49-F238E27FC236}">
-                <a16:creationId xmlns:a16="http://schemas.microsoft.com/office/drawing/2014/main" id="{818E14B7-2FD5-F4E6-4A70-8BF24656903A}"/>
-              </a:ext>
-            </a:extLst>
-          </p:cNvPr>
-          <p:cNvPicPr>
-            <a:picLocks noChangeAspect="1" noChangeArrowheads="1"/>
-          </p:cNvPicPr>
-          <p:nvPr/>
-        </p:nvPicPr>
-        <p:blipFill>
-          <a:blip r:embed="rId3"/>
-          <a:srcRect/>
-          <a:stretch/>
-        </p:blipFill>
-        <p:spPr bwMode="auto">
-          <a:xfrm>
-            <a:off x="7372865" y="2150076"/>
-            <a:ext cx="5369184" cy="4026888"/>
-          </a:xfrm>
-          <a:prstGeom prst="rect">
-            <a:avLst/>
-          </a:prstGeom>
-          <a:noFill/>
-          <a:extLst>
-            <a:ext uri="{909E8E84-426E-40DD-AFC4-6F175D3DCCD1}">
-              <a14:hiddenFill xmlns:a14="http://schemas.microsoft.com/office/drawing/2010/main">
-                <a:solidFill>
-                  <a:srgbClr val="FFFFFF"/>
-                </a:solidFill>
-              </a14:hiddenFill>
-            </a:ext>
-          </a:extLst>
-        </p:spPr>
-      </p:pic>
-      <p:sp>
-        <p:nvSpPr>
-          <p:cNvPr id="4" name="Oval 3">
-            <a:extLst>
-              <a:ext uri="{FF2B5EF4-FFF2-40B4-BE49-F238E27FC236}">
-                <a16:creationId xmlns:a16="http://schemas.microsoft.com/office/drawing/2014/main" id="{3FA54BF1-D1C8-675D-B57D-5C99E4A4F739}"/>
-              </a:ext>
-            </a:extLst>
-          </p:cNvPr>
-          <p:cNvSpPr/>
-          <p:nvPr/>
-        </p:nvSpPr>
-        <p:spPr>
-          <a:xfrm>
-            <a:off x="11557591" y="4401879"/>
-            <a:ext cx="91440" cy="91440"/>
-          </a:xfrm>
-          <a:prstGeom prst="ellipse">
-            <a:avLst/>
-          </a:prstGeom>
-          <a:solidFill>
-            <a:schemeClr val="tx1"/>
-          </a:solidFill>
-        </p:spPr>
-        <p:style>
-          <a:lnRef idx="2">
-            <a:schemeClr val="accent1">
-              <a:shade val="15000"/>
-            </a:schemeClr>
-          </a:lnRef>
-          <a:fillRef idx="1">
-            <a:schemeClr val="accent1"/>
-          </a:fillRef>
-          <a:effectRef idx="0">
-            <a:schemeClr val="accent1"/>
-          </a:effectRef>
-          <a:fontRef idx="minor">
-            <a:schemeClr val="lt1"/>
-          </a:fontRef>
-        </p:style>
-        <p:txBody>
-          <a:bodyPr rtlCol="0" anchor="ctr"/>
-          <a:lstStyle/>
-          <a:p>
-            <a:pPr algn="ctr"/>
-            <a:endParaRPr lang="en-US"/>
-          </a:p>
-        </p:txBody>
-      </p:sp>
-      <p:cxnSp>
-        <p:nvCxnSpPr>
-          <p:cNvPr id="6" name="Straight Arrow Connector 5">
-            <a:extLst>
-              <a:ext uri="{FF2B5EF4-FFF2-40B4-BE49-F238E27FC236}">
-                <a16:creationId xmlns:a16="http://schemas.microsoft.com/office/drawing/2014/main" id="{38285FCB-8A52-4597-49F6-924B36BF7861}"/>
-              </a:ext>
-            </a:extLst>
-          </p:cNvPr>
-          <p:cNvCxnSpPr/>
-          <p:nvPr/>
-        </p:nvCxnSpPr>
-        <p:spPr>
-          <a:xfrm flipH="1">
-            <a:off x="11649031" y="3338623"/>
-            <a:ext cx="642206" cy="978196"/>
-          </a:xfrm>
-          <a:prstGeom prst="straightConnector1">
-            <a:avLst/>
-          </a:prstGeom>
-          <a:ln w="38100">
-            <a:solidFill>
-              <a:srgbClr val="FF0000"/>
-            </a:solidFill>
-            <a:tailEnd type="triangle"/>
-          </a:ln>
-        </p:spPr>
-        <p:style>
-          <a:lnRef idx="2">
-            <a:schemeClr val="accent1"/>
-          </a:lnRef>
-          <a:fillRef idx="0">
-            <a:schemeClr val="accent1"/>
-          </a:fillRef>
-          <a:effectRef idx="1">
-            <a:schemeClr val="accent1"/>
-          </a:effectRef>
-          <a:fontRef idx="minor">
-            <a:schemeClr val="tx1"/>
-          </a:fontRef>
-        </p:style>
-      </p:cxnSp>
-      <p:sp>
-        <p:nvSpPr>
-          <p:cNvPr id="7" name="Oval 6">
-            <a:extLst>
-              <a:ext uri="{FF2B5EF4-FFF2-40B4-BE49-F238E27FC236}">
-                <a16:creationId xmlns:a16="http://schemas.microsoft.com/office/drawing/2014/main" id="{6A3107A5-C854-2893-E7A7-201B21680119}"/>
-              </a:ext>
-            </a:extLst>
-          </p:cNvPr>
-          <p:cNvSpPr/>
-          <p:nvPr/>
-        </p:nvSpPr>
-        <p:spPr>
-          <a:xfrm rot="17651866">
-            <a:off x="10908858" y="4051401"/>
-            <a:ext cx="91440" cy="91440"/>
-          </a:xfrm>
-          <a:prstGeom prst="ellipse">
-            <a:avLst/>
-          </a:prstGeom>
-          <a:solidFill>
-            <a:schemeClr val="accent6"/>
-          </a:solidFill>
-        </p:spPr>
-        <p:style>
-          <a:lnRef idx="2">
-            <a:schemeClr val="accent1">
-              <a:shade val="15000"/>
-            </a:schemeClr>
-          </a:lnRef>
-          <a:fillRef idx="1">
-            <a:schemeClr val="accent1"/>
-          </a:fillRef>
-          <a:effectRef idx="0">
-            <a:schemeClr val="accent1"/>
-          </a:effectRef>
-          <a:fontRef idx="minor">
-            <a:schemeClr val="lt1"/>
-          </a:fontRef>
-        </p:style>
-        <p:txBody>
-          <a:bodyPr rtlCol="0" anchor="ctr"/>
-          <a:lstStyle/>
-          <a:p>
-            <a:pPr algn="ctr"/>
-            <a:endParaRPr lang="en-US"/>
-          </a:p>
-        </p:txBody>
-      </p:sp>
-      <p:cxnSp>
-        <p:nvCxnSpPr>
-          <p:cNvPr id="8" name="Straight Arrow Connector 7">
-            <a:extLst>
-              <a:ext uri="{FF2B5EF4-FFF2-40B4-BE49-F238E27FC236}">
-                <a16:creationId xmlns:a16="http://schemas.microsoft.com/office/drawing/2014/main" id="{868AC9F4-B3C1-EF70-AAB2-51BFE740A978}"/>
-              </a:ext>
-            </a:extLst>
-          </p:cNvPr>
-          <p:cNvCxnSpPr/>
-          <p:nvPr/>
-        </p:nvCxnSpPr>
-        <p:spPr>
-          <a:xfrm flipH="1">
-            <a:off x="11006825" y="3037317"/>
-            <a:ext cx="642206" cy="978196"/>
-          </a:xfrm>
-          <a:prstGeom prst="straightConnector1">
-            <a:avLst/>
-          </a:prstGeom>
-          <a:ln w="38100">
-            <a:solidFill>
-              <a:srgbClr val="FF0000"/>
-            </a:solidFill>
-            <a:tailEnd type="triangle"/>
-          </a:ln>
-        </p:spPr>
-        <p:style>
-          <a:lnRef idx="2">
-            <a:schemeClr val="accent1"/>
-          </a:lnRef>
-          <a:fillRef idx="0">
-            <a:schemeClr val="accent1"/>
-          </a:fillRef>
-          <a:effectRef idx="1">
-            <a:schemeClr val="accent1"/>
-          </a:effectRef>
-          <a:fontRef idx="minor">
-            <a:schemeClr val="tx1"/>
-          </a:fontRef>
-        </p:style>
-      </p:cxnSp>
-    </p:spTree>
-    <p:extLst>
-      <p:ext uri="{BB962C8B-B14F-4D97-AF65-F5344CB8AC3E}">
-        <p14:creationId xmlns:p14="http://schemas.microsoft.com/office/powerpoint/2010/main" val="2227557205"/>
-      </p:ext>
-    </p:extLst>
-  </p:cSld>
-  <p:clrMapOvr>
-    <a:masterClrMapping/>
-  </p:clrMapOvr>
-</p:sld>
-</file>
-
-<file path=ppt/slides/slide7.xml><?xml version="1.0" encoding="utf-8"?>
-<p:sld xmlns:a="http://schemas.openxmlformats.org/drawingml/2006/main" xmlns:r="http://schemas.openxmlformats.org/officeDocument/2006/relationships" xmlns:p="http://schemas.openxmlformats.org/presentationml/2006/main">
-  <p:cSld>
-    <p:spTree>
-      <p:nvGrpSpPr>
-        <p:cNvPr id="1" name="">
-          <a:extLst>
-            <a:ext uri="{FF2B5EF4-FFF2-40B4-BE49-F238E27FC236}">
-              <a16:creationId xmlns:a16="http://schemas.microsoft.com/office/drawing/2014/main" id="{54C1DE8E-3377-DEC3-8D5A-FA2D4C3A2240}"/>
-            </a:ext>
-          </a:extLst>
-        </p:cNvPr>
-        <p:cNvGrpSpPr/>
-        <p:nvPr/>
-      </p:nvGrpSpPr>
-      <p:grpSpPr>
-        <a:xfrm>
-          <a:off x="0" y="0"/>
-          <a:ext cx="0" cy="0"/>
-          <a:chOff x="0" y="0"/>
-          <a:chExt cx="0" cy="0"/>
-        </a:xfrm>
-      </p:grpSpPr>
-      <p:sp>
-        <p:nvSpPr>
-          <p:cNvPr id="2" name="Title 1">
-            <a:extLst>
-              <a:ext uri="{FF2B5EF4-FFF2-40B4-BE49-F238E27FC236}">
-                <a16:creationId xmlns:a16="http://schemas.microsoft.com/office/drawing/2014/main" id="{6C723770-35F4-D6D7-31C5-93AE798B24E2}"/>
-              </a:ext>
-            </a:extLst>
-          </p:cNvPr>
-          <p:cNvSpPr>
-            <a:spLocks noGrp="1"/>
-          </p:cNvSpPr>
-          <p:nvPr>
-            <p:ph type="title"/>
-          </p:nvPr>
-        </p:nvSpPr>
-        <p:spPr/>
-        <p:txBody>
-          <a:bodyPr/>
-          <a:lstStyle/>
-          <a:p>
-            <a:r>
-              <a:rPr lang="en-US" dirty="0"/>
-              <a:t>Introduction to Machine Learning</a:t>
-            </a:r>
-          </a:p>
-        </p:txBody>
-      </p:sp>
-      <p:sp>
-        <p:nvSpPr>
-          <p:cNvPr id="3" name="Content Placeholder 2">
-            <a:extLst>
-              <a:ext uri="{FF2B5EF4-FFF2-40B4-BE49-F238E27FC236}">
-                <a16:creationId xmlns:a16="http://schemas.microsoft.com/office/drawing/2014/main" id="{E9171420-17AD-AA41-68B7-A0FB2536EF24}"/>
-              </a:ext>
-            </a:extLst>
-          </p:cNvPr>
-          <p:cNvSpPr>
-            <a:spLocks noGrp="1"/>
-          </p:cNvSpPr>
-          <p:nvPr>
-            <p:ph idx="1"/>
-          </p:nvPr>
-        </p:nvSpPr>
-        <p:spPr>
-          <a:xfrm>
-            <a:off x="838200" y="1825625"/>
-            <a:ext cx="6687065" cy="4351338"/>
-          </a:xfrm>
-        </p:spPr>
-        <p:txBody>
-          <a:bodyPr>
-            <a:normAutofit/>
-          </a:bodyPr>
-          <a:lstStyle/>
-          <a:p>
-            <a:pPr marL="0" indent="0">
-              <a:buNone/>
-            </a:pPr>
-            <a:r>
-              <a:rPr lang="en-US" b="1" dirty="0"/>
-              <a:t>Classification</a:t>
-            </a:r>
-            <a:r>
-              <a:rPr lang="en-US" dirty="0"/>
-              <a:t> – Predicting discrete labels</a:t>
-            </a:r>
-          </a:p>
-          <a:p>
-            <a:pPr marL="0" indent="0">
-              <a:buNone/>
-            </a:pPr>
-            <a:endParaRPr lang="en-US" dirty="0"/>
-          </a:p>
-          <a:p>
-            <a:pPr marL="0" indent="0">
-              <a:buNone/>
-            </a:pPr>
-            <a:r>
-              <a:rPr lang="en-US" dirty="0"/>
-              <a:t>Not all classification problems are linearly separable, we will learn methods that can learn non-linear boundaries to separate the data. </a:t>
-            </a:r>
-          </a:p>
-          <a:p>
-            <a:pPr marL="0" indent="0">
-              <a:buNone/>
-            </a:pPr>
-            <a:endParaRPr lang="en-US" dirty="0"/>
-          </a:p>
-        </p:txBody>
-      </p:sp>
-      <p:pic>
-        <p:nvPicPr>
-          <p:cNvPr id="3074" name="Picture 2" descr="Example of classification problem">
-            <a:extLst>
-              <a:ext uri="{FF2B5EF4-FFF2-40B4-BE49-F238E27FC236}">
-                <a16:creationId xmlns:a16="http://schemas.microsoft.com/office/drawing/2014/main" id="{722F887F-A016-2147-2B55-9CAC23872DC5}"/>
-              </a:ext>
-            </a:extLst>
-          </p:cNvPr>
-          <p:cNvPicPr>
-            <a:picLocks noChangeAspect="1" noChangeArrowheads="1"/>
-          </p:cNvPicPr>
-          <p:nvPr/>
-        </p:nvPicPr>
-        <p:blipFill>
-          <a:blip r:embed="rId3">
-            <a:extLst>
-              <a:ext uri="{28A0092B-C50C-407E-A947-70E740481C1C}">
-                <a14:useLocalDpi xmlns:a14="http://schemas.microsoft.com/office/drawing/2010/main" val="0"/>
-              </a:ext>
-            </a:extLst>
-          </a:blip>
-          <a:srcRect/>
-          <a:stretch>
-            <a:fillRect/>
-          </a:stretch>
-        </p:blipFill>
-        <p:spPr bwMode="auto">
-          <a:xfrm>
-            <a:off x="7375503" y="1825625"/>
-            <a:ext cx="5008880" cy="4933507"/>
-          </a:xfrm>
-          <a:prstGeom prst="rect">
-            <a:avLst/>
-          </a:prstGeom>
-          <a:noFill/>
-          <a:extLst>
-            <a:ext uri="{909E8E84-426E-40DD-AFC4-6F175D3DCCD1}">
-              <a14:hiddenFill xmlns:a14="http://schemas.microsoft.com/office/drawing/2010/main">
-                <a:solidFill>
-                  <a:srgbClr val="FFFFFF"/>
-                </a:solidFill>
-              </a14:hiddenFill>
-            </a:ext>
-          </a:extLst>
-        </p:spPr>
-      </p:pic>
-    </p:spTree>
-    <p:extLst>
-      <p:ext uri="{BB962C8B-B14F-4D97-AF65-F5344CB8AC3E}">
-        <p14:creationId xmlns:p14="http://schemas.microsoft.com/office/powerpoint/2010/main" val="1067743693"/>
-      </p:ext>
-    </p:extLst>
-  </p:cSld>
-  <p:clrMapOvr>
-    <a:masterClrMapping/>
-  </p:clrMapOvr>
-</p:sld>
-</file>
-
-<file path=ppt/slides/slide8.xml><?xml version="1.0" encoding="utf-8"?>
-<p:sld xmlns:a="http://schemas.openxmlformats.org/drawingml/2006/main" xmlns:r="http://schemas.openxmlformats.org/officeDocument/2006/relationships" xmlns:p="http://schemas.openxmlformats.org/presentationml/2006/main">
-  <p:cSld>
-    <p:spTree>
-      <p:nvGrpSpPr>
-        <p:cNvPr id="1" name="">
-          <a:extLst>
-            <a:ext uri="{FF2B5EF4-FFF2-40B4-BE49-F238E27FC236}">
-              <a16:creationId xmlns:a16="http://schemas.microsoft.com/office/drawing/2014/main" id="{F9D2BBF8-0D7B-C127-B963-90322B75B1B1}"/>
-            </a:ext>
-          </a:extLst>
-        </p:cNvPr>
-        <p:cNvGrpSpPr/>
-        <p:nvPr/>
-      </p:nvGrpSpPr>
-      <p:grpSpPr>
-        <a:xfrm>
-          <a:off x="0" y="0"/>
-          <a:ext cx="0" cy="0"/>
-          <a:chOff x="0" y="0"/>
-          <a:chExt cx="0" cy="0"/>
-        </a:xfrm>
-      </p:grpSpPr>
-      <p:sp>
-        <p:nvSpPr>
-          <p:cNvPr id="2" name="Title 1">
-            <a:extLst>
-              <a:ext uri="{FF2B5EF4-FFF2-40B4-BE49-F238E27FC236}">
-                <a16:creationId xmlns:a16="http://schemas.microsoft.com/office/drawing/2014/main" id="{B43BC36A-C78D-B23C-B657-4C86EA0BF0B9}"/>
-              </a:ext>
-            </a:extLst>
-          </p:cNvPr>
-          <p:cNvSpPr>
-            <a:spLocks noGrp="1"/>
-          </p:cNvSpPr>
-          <p:nvPr>
-            <p:ph type="title"/>
-          </p:nvPr>
-        </p:nvSpPr>
-        <p:spPr/>
-        <p:txBody>
-          <a:bodyPr/>
-          <a:lstStyle/>
-          <a:p>
-            <a:r>
-              <a:rPr lang="en-US" dirty="0"/>
-              <a:t>Introduction to Machine Learning</a:t>
-            </a:r>
-          </a:p>
-        </p:txBody>
-      </p:sp>
-      <p:sp>
-        <p:nvSpPr>
-          <p:cNvPr id="3" name="Content Placeholder 2">
-            <a:extLst>
-              <a:ext uri="{FF2B5EF4-FFF2-40B4-BE49-F238E27FC236}">
-                <a16:creationId xmlns:a16="http://schemas.microsoft.com/office/drawing/2014/main" id="{EFF6BC4B-EF20-8EB5-D277-38E2F9831068}"/>
-              </a:ext>
-            </a:extLst>
-          </p:cNvPr>
-          <p:cNvSpPr>
-            <a:spLocks noGrp="1"/>
-          </p:cNvSpPr>
-          <p:nvPr>
-            <p:ph idx="1"/>
-          </p:nvPr>
-        </p:nvSpPr>
-        <p:spPr>
-          <a:xfrm>
-            <a:off x="838200" y="1825625"/>
-            <a:ext cx="6687065" cy="4351338"/>
-          </a:xfrm>
-        </p:spPr>
-        <p:txBody>
-          <a:bodyPr>
-            <a:normAutofit/>
-          </a:bodyPr>
-          <a:lstStyle/>
-          <a:p>
-            <a:pPr marL="0" indent="0">
-              <a:buNone/>
-            </a:pPr>
-            <a:r>
-              <a:rPr lang="en-US" b="1" dirty="0"/>
-              <a:t>Classification</a:t>
-            </a:r>
-            <a:r>
-              <a:rPr lang="en-US" dirty="0"/>
-              <a:t> – Predicting discrete labels</a:t>
-            </a:r>
-          </a:p>
-          <a:p>
-            <a:pPr marL="0" indent="0">
-              <a:buNone/>
-            </a:pPr>
-            <a:endParaRPr lang="en-US" dirty="0"/>
-          </a:p>
-          <a:p>
-            <a:pPr marL="0" indent="0">
-              <a:buNone/>
-            </a:pPr>
-            <a:r>
-              <a:rPr lang="en-US" dirty="0"/>
-              <a:t>Not all classification problems are linearly separable, we will learn methods that can learn non-linear boundaries to separate the data. </a:t>
-            </a:r>
-          </a:p>
-          <a:p>
-            <a:pPr marL="0" indent="0">
-              <a:buNone/>
-            </a:pPr>
-            <a:endParaRPr lang="en-US" dirty="0"/>
-          </a:p>
-        </p:txBody>
-      </p:sp>
-      <p:pic>
-        <p:nvPicPr>
-          <p:cNvPr id="3074" name="Picture 2" descr="Example of classification problem">
-            <a:extLst>
-              <a:ext uri="{FF2B5EF4-FFF2-40B4-BE49-F238E27FC236}">
-                <a16:creationId xmlns:a16="http://schemas.microsoft.com/office/drawing/2014/main" id="{79B2745D-FF1F-A59E-C356-4FA2EB0EC3A6}"/>
-              </a:ext>
-            </a:extLst>
-          </p:cNvPr>
-          <p:cNvPicPr>
-            <a:picLocks noChangeAspect="1" noChangeArrowheads="1"/>
-          </p:cNvPicPr>
-          <p:nvPr/>
-        </p:nvPicPr>
-        <p:blipFill>
-          <a:blip r:embed="rId3"/>
-          <a:srcRect/>
-          <a:stretch/>
-        </p:blipFill>
-        <p:spPr bwMode="auto">
-          <a:xfrm>
-            <a:off x="7407288" y="1825625"/>
-            <a:ext cx="4945309" cy="4933507"/>
-          </a:xfrm>
-          <a:prstGeom prst="rect">
-            <a:avLst/>
-          </a:prstGeom>
-          <a:noFill/>
-          <a:extLst>
-            <a:ext uri="{909E8E84-426E-40DD-AFC4-6F175D3DCCD1}">
-              <a14:hiddenFill xmlns:a14="http://schemas.microsoft.com/office/drawing/2010/main">
-                <a:solidFill>
-                  <a:srgbClr val="FFFFFF"/>
-                </a:solidFill>
-              </a14:hiddenFill>
-            </a:ext>
-          </a:extLst>
-        </p:spPr>
-      </p:pic>
-    </p:spTree>
-    <p:extLst>
-      <p:ext uri="{BB962C8B-B14F-4D97-AF65-F5344CB8AC3E}">
-        <p14:creationId xmlns:p14="http://schemas.microsoft.com/office/powerpoint/2010/main" val="1700444571"/>
-      </p:ext>
-    </p:extLst>
-  </p:cSld>
-  <p:clrMapOvr>
-    <a:masterClrMapping/>
-  </p:clrMapOvr>
-</p:sld>
-</file>
-
-<file path=ppt/slides/slide9.xml><?xml version="1.0" encoding="utf-8"?>
-<p:sld xmlns:a="http://schemas.openxmlformats.org/drawingml/2006/main" xmlns:r="http://schemas.openxmlformats.org/officeDocument/2006/relationships" xmlns:p="http://schemas.openxmlformats.org/presentationml/2006/main">
-  <p:cSld>
-    <p:spTree>
-      <p:nvGrpSpPr>
-        <p:cNvPr id="1" name="">
-          <a:extLst>
-            <a:ext uri="{FF2B5EF4-FFF2-40B4-BE49-F238E27FC236}">
-              <a16:creationId xmlns:a16="http://schemas.microsoft.com/office/drawing/2014/main" id="{5B13372F-F4C4-21F1-67A7-97D3BB2F74C9}"/>
-            </a:ext>
-          </a:extLst>
-        </p:cNvPr>
-        <p:cNvGrpSpPr/>
-        <p:nvPr/>
-      </p:nvGrpSpPr>
-      <p:grpSpPr>
-        <a:xfrm>
-          <a:off x="0" y="0"/>
-          <a:ext cx="0" cy="0"/>
-          <a:chOff x="0" y="0"/>
-          <a:chExt cx="0" cy="0"/>
-        </a:xfrm>
-      </p:grpSpPr>
-      <p:sp>
-        <p:nvSpPr>
-          <p:cNvPr id="2" name="Title 1">
-            <a:extLst>
-              <a:ext uri="{FF2B5EF4-FFF2-40B4-BE49-F238E27FC236}">
-                <a16:creationId xmlns:a16="http://schemas.microsoft.com/office/drawing/2014/main" id="{DDB61746-106E-33E6-71C3-C9EB7D71463B}"/>
-              </a:ext>
-            </a:extLst>
-          </p:cNvPr>
-          <p:cNvSpPr>
-            <a:spLocks noGrp="1"/>
-          </p:cNvSpPr>
-          <p:nvPr>
-            <p:ph type="title"/>
-          </p:nvPr>
-        </p:nvSpPr>
-        <p:spPr/>
-        <p:txBody>
-          <a:bodyPr/>
-          <a:lstStyle/>
-          <a:p>
-            <a:r>
-              <a:rPr lang="en-US" dirty="0"/>
-              <a:t>Introduction to Machine Learning</a:t>
-            </a:r>
-          </a:p>
-        </p:txBody>
-      </p:sp>
-      <p:sp>
-        <p:nvSpPr>
-          <p:cNvPr id="3" name="Content Placeholder 2">
-            <a:extLst>
-              <a:ext uri="{FF2B5EF4-FFF2-40B4-BE49-F238E27FC236}">
-                <a16:creationId xmlns:a16="http://schemas.microsoft.com/office/drawing/2014/main" id="{33EE0B07-1F8D-3D93-B0C2-7641A3913946}"/>
-              </a:ext>
-            </a:extLst>
-          </p:cNvPr>
-          <p:cNvSpPr>
-            <a:spLocks noGrp="1"/>
-          </p:cNvSpPr>
-          <p:nvPr>
-            <p:ph idx="1"/>
-          </p:nvPr>
-        </p:nvSpPr>
-        <p:spPr>
-          <a:xfrm>
-            <a:off x="838200" y="1825625"/>
-            <a:ext cx="6687065" cy="4351338"/>
-          </a:xfrm>
-        </p:spPr>
-        <p:txBody>
-          <a:bodyPr>
-            <a:normAutofit fontScale="92500" lnSpcReduction="10000"/>
-          </a:bodyPr>
-          <a:lstStyle/>
-          <a:p>
-            <a:pPr marL="0" indent="0">
-              <a:buNone/>
-            </a:pPr>
-            <a:r>
-              <a:rPr lang="en-US" b="1" dirty="0"/>
-              <a:t>Regression</a:t>
-            </a:r>
-            <a:r>
-              <a:rPr lang="en-US" dirty="0"/>
-              <a:t> – Predicting continuous labels</a:t>
-            </a:r>
-          </a:p>
-          <a:p>
-            <a:pPr marL="0" indent="0">
-              <a:buNone/>
-            </a:pPr>
-            <a:endParaRPr lang="en-US" dirty="0"/>
-          </a:p>
-          <a:p>
-            <a:pPr marL="0" indent="0">
-              <a:buNone/>
-            </a:pPr>
-            <a:r>
-              <a:rPr lang="en-US" dirty="0"/>
-              <a:t>In a regression problem, there are typically one or multiple features (called independent variable(s)) and each feature set is associated with an output (or dependent variable). </a:t>
-            </a:r>
-          </a:p>
-          <a:p>
-            <a:pPr marL="0" indent="0">
-              <a:buNone/>
-            </a:pPr>
-            <a:endParaRPr lang="en-US" dirty="0"/>
-          </a:p>
-          <a:p>
-            <a:pPr marL="0" indent="0">
-              <a:buNone/>
-            </a:pPr>
-            <a:r>
-              <a:rPr lang="en-US" dirty="0"/>
-              <a:t>In this example, we have one independent variable (plotted in the x-axis) and one dependent variable (plotted in the x-axis) </a:t>
-            </a:r>
-          </a:p>
-          <a:p>
-            <a:pPr marL="0" indent="0">
-              <a:buNone/>
-            </a:pPr>
-            <a:endParaRPr lang="en-US" dirty="0"/>
-          </a:p>
-        </p:txBody>
-      </p:sp>
-      <p:pic>
-        <p:nvPicPr>
-          <p:cNvPr id="5" name="Picture 4" descr="Example of regression problem">
-            <a:extLst>
-              <a:ext uri="{FF2B5EF4-FFF2-40B4-BE49-F238E27FC236}">
-                <a16:creationId xmlns:a16="http://schemas.microsoft.com/office/drawing/2014/main" id="{499CF652-9ABB-42C1-8011-99EADA4E876F}"/>
-              </a:ext>
-            </a:extLst>
-          </p:cNvPr>
-          <p:cNvPicPr>
-            <a:picLocks noChangeAspect="1"/>
-          </p:cNvPicPr>
-          <p:nvPr/>
-        </p:nvPicPr>
-        <p:blipFill>
-          <a:blip r:embed="rId3"/>
-          <a:stretch>
-            <a:fillRect/>
-          </a:stretch>
-        </p:blipFill>
-        <p:spPr>
-          <a:xfrm>
-            <a:off x="7525265" y="2298073"/>
-            <a:ext cx="4836926" cy="3406442"/>
-          </a:xfrm>
-          <a:prstGeom prst="rect">
-            <a:avLst/>
-          </a:prstGeom>
-        </p:spPr>
-      </p:pic>
-      <p:sp>
-        <p:nvSpPr>
-          <p:cNvPr id="6" name="TextBox 5">
-            <a:extLst>
-              <a:ext uri="{FF2B5EF4-FFF2-40B4-BE49-F238E27FC236}">
-                <a16:creationId xmlns:a16="http://schemas.microsoft.com/office/drawing/2014/main" id="{B26D8388-5D5C-42C6-8C5A-82DD400320C0}"/>
-              </a:ext>
-            </a:extLst>
-          </p:cNvPr>
-          <p:cNvSpPr txBox="1"/>
-          <p:nvPr/>
-        </p:nvSpPr>
-        <p:spPr>
-          <a:xfrm>
-            <a:off x="8773760" y="5807078"/>
-            <a:ext cx="2577180" cy="369332"/>
-          </a:xfrm>
-          <a:prstGeom prst="rect">
-            <a:avLst/>
-          </a:prstGeom>
-          <a:noFill/>
-        </p:spPr>
-        <p:txBody>
-          <a:bodyPr wrap="none" rtlCol="0">
-            <a:spAutoFit/>
-          </a:bodyPr>
-          <a:lstStyle/>
-          <a:p>
-            <a:r>
-              <a:rPr lang="en-US" dirty="0"/>
-              <a:t>Independent variable (x)</a:t>
-            </a:r>
-          </a:p>
-        </p:txBody>
-      </p:sp>
-      <p:sp>
-        <p:nvSpPr>
-          <p:cNvPr id="7" name="TextBox 6">
-            <a:extLst>
-              <a:ext uri="{FF2B5EF4-FFF2-40B4-BE49-F238E27FC236}">
-                <a16:creationId xmlns:a16="http://schemas.microsoft.com/office/drawing/2014/main" id="{E8553B01-5E92-D315-D700-306F97791041}"/>
-              </a:ext>
-            </a:extLst>
-          </p:cNvPr>
-          <p:cNvSpPr txBox="1"/>
-          <p:nvPr/>
-        </p:nvSpPr>
-        <p:spPr>
-          <a:xfrm rot="16200000">
-            <a:off x="6205880" y="3816628"/>
-            <a:ext cx="2421689" cy="369332"/>
-          </a:xfrm>
-          <a:prstGeom prst="rect">
-            <a:avLst/>
-          </a:prstGeom>
-          <a:noFill/>
-        </p:spPr>
-        <p:txBody>
-          <a:bodyPr wrap="none" rtlCol="0">
-            <a:spAutoFit/>
-          </a:bodyPr>
-          <a:lstStyle/>
-          <a:p>
-            <a:r>
-              <a:rPr lang="en-US" dirty="0"/>
-              <a:t>Dependent variable (y)</a:t>
-            </a:r>
-          </a:p>
-        </p:txBody>
-      </p:sp>
-    </p:spTree>
-    <p:extLst>
-      <p:ext uri="{BB962C8B-B14F-4D97-AF65-F5344CB8AC3E}">
-        <p14:creationId xmlns:p14="http://schemas.microsoft.com/office/powerpoint/2010/main" val="2630271377"/>
       </p:ext>
     </p:extLst>
   </p:cSld>
